--- a/services/web-app/resources/thesis-essay-decks/lesson-2-pre-writing.pptx
+++ b/services/web-app/resources/thesis-essay-decks/lesson-2-pre-writing.pptx
@@ -4044,7 +4044,7 @@
               <a:buNone/>
             </a:pPr>
             <a:r>
-              <a:rPr lang="en-US" sz="2600" dirty="0">
+              <a:rPr lang="en-US" sz="2300" dirty="0">
                 <a:solidFill>
                   <a:srgbClr val="3C3828"/>
                 </a:solidFill>
@@ -4054,7 +4054,7 @@
               </a:rPr>
               <a:t>Without it, your essay might be rambling and disorganized</a:t>
             </a:r>
-            <a:endParaRPr lang="en-US" sz="2600" dirty="0"/>
+            <a:endParaRPr lang="en-US" sz="2300" dirty="0"/>
           </a:p>
         </p:txBody>
       </p:sp>
@@ -4206,7 +4206,7 @@
               <a:buNone/>
             </a:pPr>
             <a:r>
-              <a:rPr lang="en-US" sz="2600" dirty="0">
+              <a:rPr lang="en-US" sz="2300" dirty="0">
                 <a:solidFill>
                   <a:srgbClr val="3C3828"/>
                 </a:solidFill>
@@ -4216,7 +4216,7 @@
               </a:rPr>
               <a:t>Great thesis statements lead to great essays</a:t>
             </a:r>
-            <a:endParaRPr lang="en-US" sz="2600" dirty="0"/>
+            <a:endParaRPr lang="en-US" sz="2300" dirty="0"/>
           </a:p>
         </p:txBody>
       </p:sp>
@@ -4368,7 +4368,7 @@
               <a:buNone/>
             </a:pPr>
             <a:r>
-              <a:rPr lang="en-US" sz="2600" dirty="0">
+              <a:rPr lang="en-US" sz="2300" dirty="0">
                 <a:solidFill>
                   <a:srgbClr val="3C3828"/>
                 </a:solidFill>
@@ -4381,7 +4381,7 @@
               </a:rPr>
               <a:t>Don’t ever start an essay until you know what you’re going to say!</a:t>
             </a:r>
-            <a:endParaRPr lang="en-US" sz="2600" dirty="0"/>
+            <a:endParaRPr lang="en-US" sz="2300" dirty="0"/>
           </a:p>
         </p:txBody>
       </p:sp>

--- a/services/web-app/resources/thesis-essay-decks/lesson-2-pre-writing.pptx
+++ b/services/web-app/resources/thesis-essay-decks/lesson-2-pre-writing.pptx
@@ -3156,7 +3156,7 @@
       </p:sp>
       <p:pic>
         <p:nvPicPr>
-          <p:cNvPr id="7" name="Image 0" descr="/home/user/yawp/services/web-app/scripts/thesis-essay-decks/assets/icons/lightbulb.png">    </p:cNvPr>
+          <p:cNvPr id="7" name="Image 0" descr="lightbulb icon">    </p:cNvPr>
           <p:cNvPicPr>
             <a:picLocks noChangeAspect="1"/>
           </p:cNvPicPr>
@@ -3205,7 +3205,7 @@
       </p:sp>
       <p:pic>
         <p:nvPicPr>
-          <p:cNvPr id="9" name="Image 1" descr="/home/user/yawp/services/web-app/scripts/thesis-essay-decks/assets/icons/puzzle.png">    </p:cNvPr>
+          <p:cNvPr id="9" name="Image 1" descr="puzzle icon">    </p:cNvPr>
           <p:cNvPicPr>
             <a:picLocks noChangeAspect="1"/>
           </p:cNvPicPr>
@@ -3254,7 +3254,7 @@
       </p:sp>
       <p:pic>
         <p:nvPicPr>
-          <p:cNvPr id="11" name="Image 2" descr="/home/user/yawp/services/web-app/scripts/thesis-essay-decks/assets/icons/thumbs.png">    </p:cNvPr>
+          <p:cNvPr id="11" name="Image 2" descr="thumbs icon">    </p:cNvPr>
           <p:cNvPicPr>
             <a:picLocks noChangeAspect="1"/>
           </p:cNvPicPr>
@@ -3824,7 +3824,7 @@
       </p:sp>
       <p:pic>
         <p:nvPicPr>
-          <p:cNvPr id="5" name="Image 0" descr="/home/user/yawp/services/web-app/scripts/thesis-essay-decks/assets/icons/pencil.png">    </p:cNvPr>
+          <p:cNvPr id="5" name="Image 0" descr="pencil icon">    </p:cNvPr>
           <p:cNvPicPr>
             <a:picLocks noChangeAspect="1"/>
           </p:cNvPicPr>
@@ -4644,7 +4644,7 @@
       </p:sp>
       <p:pic>
         <p:nvPicPr>
-          <p:cNvPr id="7" name="Image 0" descr="/home/user/yawp/services/web-app/scripts/thesis-essay-decks/assets/icons/lightbulb.png">    </p:cNvPr>
+          <p:cNvPr id="7" name="Image 0" descr="lightbulb icon">    </p:cNvPr>
           <p:cNvPicPr>
             <a:picLocks noChangeAspect="1"/>
           </p:cNvPicPr>
@@ -4693,7 +4693,7 @@
       </p:sp>
       <p:pic>
         <p:nvPicPr>
-          <p:cNvPr id="9" name="Image 1" descr="/home/user/yawp/services/web-app/scripts/thesis-essay-decks/assets/icons/puzzle.png">    </p:cNvPr>
+          <p:cNvPr id="9" name="Image 1" descr="puzzle icon">    </p:cNvPr>
           <p:cNvPicPr>
             <a:picLocks noChangeAspect="1"/>
           </p:cNvPicPr>
@@ -4742,7 +4742,7 @@
       </p:sp>
       <p:pic>
         <p:nvPicPr>
-          <p:cNvPr id="11" name="Image 2" descr="/home/user/yawp/services/web-app/scripts/thesis-essay-decks/assets/icons/thumbs.png">    </p:cNvPr>
+          <p:cNvPr id="11" name="Image 2" descr="thumbs icon">    </p:cNvPr>
           <p:cNvPicPr>
             <a:picLocks noChangeAspect="1"/>
           </p:cNvPicPr>
@@ -5449,12 +5449,6 @@
               </a:rPr>
               <a:t>Take time before you write your essay to critically think about the prompt and to </a:t>
             </a:r>
-            <a:pPr indent="0" marL="0">
-              <a:lnSpc>
-                <a:spcPct val="115000"/>
-              </a:lnSpc>
-              <a:buNone/>
-            </a:pPr>
             <a:r>
               <a:rPr lang="en-US" sz="2100" dirty="0">
                 <a:solidFill>
@@ -5643,9 +5637,6 @@
               </a:rPr>
               <a:t>Critical thinking is simply </a:t>
             </a:r>
-            <a:pPr indent="0" marL="0">
-              <a:buNone/>
-            </a:pPr>
             <a:r>
               <a:rPr lang="en-US" sz="3000" dirty="0">
                 <a:solidFill>
@@ -5660,9 +5651,6 @@
               </a:rPr>
               <a:t>asking questions and seeking answers</a:t>
             </a:r>
-            <a:pPr indent="0" marL="0">
-              <a:buNone/>
-            </a:pPr>
             <a:r>
               <a:rPr lang="en-US" sz="3000" dirty="0">
                 <a:solidFill>
@@ -6196,7 +6184,7 @@
       </p:sp>
       <p:pic>
         <p:nvPicPr>
-          <p:cNvPr id="5" name="Image 0" descr="/home/user/yawp/services/web-app/scripts/thesis-essay-decks/assets/icons/question.png">    </p:cNvPr>
+          <p:cNvPr id="5" name="Image 0" descr="question icon">    </p:cNvPr>
           <p:cNvPicPr>
             <a:picLocks noChangeAspect="1"/>
           </p:cNvPicPr>
@@ -6365,12 +6353,6 @@
               </a:rPr>
               <a:t>I love the Creed movies. </a:t>
             </a:r>
-            <a:pPr indent="0" marL="0">
-              <a:lnSpc>
-                <a:spcPct val="125000"/>
-              </a:lnSpc>
-              <a:buNone/>
-            </a:pPr>
             <a:r>
               <a:rPr lang="en-US" sz="1800" b="1" dirty="0">
                 <a:solidFill>
@@ -6382,12 +6364,6 @@
               </a:rPr>
               <a:t>Why?</a:t>
             </a:r>
-            <a:pPr indent="0" marL="0">
-              <a:lnSpc>
-                <a:spcPct val="125000"/>
-              </a:lnSpc>
-              <a:buNone/>
-            </a:pPr>
             <a:r>
               <a:rPr lang="en-US" sz="1800" dirty="0">
                 <a:solidFill>
@@ -6399,12 +6375,6 @@
               </a:rPr>
               <a:t> Because they’re amazing! </a:t>
             </a:r>
-            <a:pPr indent="0" marL="0">
-              <a:lnSpc>
-                <a:spcPct val="125000"/>
-              </a:lnSpc>
-              <a:buNone/>
-            </a:pPr>
             <a:r>
               <a:rPr lang="en-US" sz="1800" b="1" dirty="0">
                 <a:solidFill>
@@ -6416,12 +6386,6 @@
               </a:rPr>
               <a:t>Why?</a:t>
             </a:r>
-            <a:pPr indent="0" marL="0">
-              <a:lnSpc>
-                <a:spcPct val="125000"/>
-              </a:lnSpc>
-              <a:buNone/>
-            </a:pPr>
             <a:r>
               <a:rPr lang="en-US" sz="1800" dirty="0">
                 <a:solidFill>
@@ -6433,12 +6397,6 @@
               </a:rPr>
               <a:t> They’re really uplifting. </a:t>
             </a:r>
-            <a:pPr indent="0" marL="0">
-              <a:lnSpc>
-                <a:spcPct val="125000"/>
-              </a:lnSpc>
-              <a:buNone/>
-            </a:pPr>
             <a:r>
               <a:rPr lang="en-US" sz="1800" b="1" dirty="0">
                 <a:solidFill>
@@ -6450,12 +6408,6 @@
               </a:rPr>
               <a:t>How?</a:t>
             </a:r>
-            <a:pPr indent="0" marL="0">
-              <a:lnSpc>
-                <a:spcPct val="125000"/>
-              </a:lnSpc>
-              <a:buNone/>
-            </a:pPr>
             <a:r>
               <a:rPr lang="en-US" sz="1800" dirty="0">
                 <a:solidFill>
@@ -6467,12 +6419,6 @@
               </a:rPr>
               <a:t> In that Cinderella story, underdog way. </a:t>
             </a:r>
-            <a:pPr indent="0" marL="0">
-              <a:lnSpc>
-                <a:spcPct val="125000"/>
-              </a:lnSpc>
-              <a:buNone/>
-            </a:pPr>
             <a:r>
               <a:rPr lang="en-US" sz="1800" b="1" dirty="0">
                 <a:solidFill>
@@ -6484,12 +6430,6 @@
               </a:rPr>
               <a:t>Are they uplifting in other ways?</a:t>
             </a:r>
-            <a:pPr indent="0" marL="0">
-              <a:lnSpc>
-                <a:spcPct val="125000"/>
-              </a:lnSpc>
-              <a:buNone/>
-            </a:pPr>
             <a:r>
               <a:rPr lang="en-US" sz="1800" dirty="0">
                 <a:solidFill>
@@ -6501,12 +6441,6 @@
               </a:rPr>
               <a:t> Yes, the love story between Adonis and Bianca is really touching, and the relationship between Adonis and Rocky is really moving. </a:t>
             </a:r>
-            <a:pPr indent="0" marL="0">
-              <a:lnSpc>
-                <a:spcPct val="125000"/>
-              </a:lnSpc>
-              <a:buNone/>
-            </a:pPr>
             <a:r>
               <a:rPr lang="en-US" sz="1800" b="1" dirty="0">
                 <a:solidFill>
@@ -6518,12 +6452,6 @@
               </a:rPr>
               <a:t>So it’s more than just a sports story?</a:t>
             </a:r>
-            <a:pPr indent="0" marL="0">
-              <a:lnSpc>
-                <a:spcPct val="125000"/>
-              </a:lnSpc>
-              <a:buNone/>
-            </a:pPr>
             <a:r>
               <a:rPr lang="en-US" sz="1800" dirty="0">
                 <a:solidFill>
@@ -6535,12 +6463,6 @@
               </a:rPr>
               <a:t> Definitely—it’s really a movie about relationships and overcoming things. </a:t>
             </a:r>
-            <a:pPr indent="0" marL="0">
-              <a:lnSpc>
-                <a:spcPct val="125000"/>
-              </a:lnSpc>
-              <a:buNone/>
-            </a:pPr>
             <a:r>
               <a:rPr lang="en-US" sz="1800" b="1" dirty="0">
                 <a:solidFill>
@@ -6552,12 +6474,6 @@
               </a:rPr>
               <a:t>Like what?</a:t>
             </a:r>
-            <a:pPr indent="0" marL="0">
-              <a:lnSpc>
-                <a:spcPct val="125000"/>
-              </a:lnSpc>
-              <a:buNone/>
-            </a:pPr>
             <a:r>
               <a:rPr lang="en-US" sz="1800" dirty="0">
                 <a:solidFill>
@@ -6569,12 +6485,6 @@
               </a:rPr>
               <a:t> Well, Adonis overcomes the fact that he didn’t really have a dad—Apollo Creed was not really in his life that much, even though he was this huge celebrity back in the day. </a:t>
             </a:r>
-            <a:pPr indent="0" marL="0">
-              <a:lnSpc>
-                <a:spcPct val="125000"/>
-              </a:lnSpc>
-              <a:buNone/>
-            </a:pPr>
             <a:r>
               <a:rPr lang="en-US" sz="1800" b="1" dirty="0">
                 <a:solidFill>
@@ -6586,12 +6496,6 @@
               </a:rPr>
               <a:t>How does he overcome that?</a:t>
             </a:r>
-            <a:pPr indent="0" marL="0">
-              <a:lnSpc>
-                <a:spcPct val="125000"/>
-              </a:lnSpc>
-              <a:buNone/>
-            </a:pPr>
             <a:r>
               <a:rPr lang="en-US" sz="1800" dirty="0">
                 <a:solidFill>
@@ -6603,12 +6507,6 @@
               </a:rPr>
               <a:t> I think his relationship with Rocky becomes like the dad he never had. And Rocky is having trouble with his own son. So Rocky and Adonis both fill these father-son roles for each other. And then Adonis gets to be a dad! </a:t>
             </a:r>
-            <a:pPr indent="0" marL="0">
-              <a:lnSpc>
-                <a:spcPct val="125000"/>
-              </a:lnSpc>
-              <a:buNone/>
-            </a:pPr>
             <a:r>
               <a:rPr lang="en-US" sz="1800" dirty="0">
                 <a:solidFill>
@@ -6805,7 +6703,7 @@
       </p:sp>
       <p:pic>
         <p:nvPicPr>
-          <p:cNvPr id="5" name="Image 0" descr="/home/user/yawp/services/web-app/scripts/thesis-essay-decks/assets/icons/question.png">    </p:cNvPr>
+          <p:cNvPr id="5" name="Image 0" descr="question icon">    </p:cNvPr>
           <p:cNvPicPr>
             <a:picLocks noChangeAspect="1"/>
           </p:cNvPicPr>
@@ -6974,12 +6872,6 @@
               </a:rPr>
               <a:t>I love Disney movies. </a:t>
             </a:r>
-            <a:pPr indent="0" marL="0">
-              <a:lnSpc>
-                <a:spcPct val="125000"/>
-              </a:lnSpc>
-              <a:buNone/>
-            </a:pPr>
             <a:r>
               <a:rPr lang="en-US" sz="1800" b="1" dirty="0">
                 <a:solidFill>
@@ -6991,12 +6883,6 @@
               </a:rPr>
               <a:t>Why?</a:t>
             </a:r>
-            <a:pPr indent="0" marL="0">
-              <a:lnSpc>
-                <a:spcPct val="125000"/>
-              </a:lnSpc>
-              <a:buNone/>
-            </a:pPr>
             <a:r>
               <a:rPr lang="en-US" sz="1800" dirty="0">
                 <a:solidFill>
@@ -7008,12 +6894,6 @@
               </a:rPr>
               <a:t> They make me feel so happy! </a:t>
             </a:r>
-            <a:pPr indent="0" marL="0">
-              <a:lnSpc>
-                <a:spcPct val="125000"/>
-              </a:lnSpc>
-              <a:buNone/>
-            </a:pPr>
             <a:r>
               <a:rPr lang="en-US" sz="1800" b="1" dirty="0">
                 <a:solidFill>
@@ -7025,12 +6905,6 @@
               </a:rPr>
               <a:t>Why?</a:t>
             </a:r>
-            <a:pPr indent="0" marL="0">
-              <a:lnSpc>
-                <a:spcPct val="125000"/>
-              </a:lnSpc>
-              <a:buNone/>
-            </a:pPr>
             <a:r>
               <a:rPr lang="en-US" sz="1800" dirty="0">
                 <a:solidFill>
@@ -7042,12 +6916,6 @@
               </a:rPr>
               <a:t> I really love how in most of the stories the characters go through something hard and challenging. </a:t>
             </a:r>
-            <a:pPr indent="0" marL="0">
-              <a:lnSpc>
-                <a:spcPct val="125000"/>
-              </a:lnSpc>
-              <a:buNone/>
-            </a:pPr>
             <a:r>
               <a:rPr lang="en-US" sz="1800" b="1" dirty="0">
                 <a:solidFill>
@@ -7059,12 +6927,6 @@
               </a:rPr>
               <a:t>Like what?</a:t>
             </a:r>
-            <a:pPr indent="0" marL="0">
-              <a:lnSpc>
-                <a:spcPct val="125000"/>
-              </a:lnSpc>
-              <a:buNone/>
-            </a:pPr>
             <a:r>
               <a:rPr lang="en-US" sz="1800" dirty="0">
                 <a:solidFill>
@@ -7076,12 +6938,6 @@
               </a:rPr>
               <a:t> In a lot of them, they lose a parent early in the movie. This leaves them feeling sad and alone. </a:t>
             </a:r>
-            <a:pPr indent="0" marL="0">
-              <a:lnSpc>
-                <a:spcPct val="125000"/>
-              </a:lnSpc>
-              <a:buNone/>
-            </a:pPr>
             <a:r>
               <a:rPr lang="en-US" sz="1800" b="1" dirty="0">
                 <a:solidFill>
@@ -7093,12 +6949,6 @@
               </a:rPr>
               <a:t>Then what happens?</a:t>
             </a:r>
-            <a:pPr indent="0" marL="0">
-              <a:lnSpc>
-                <a:spcPct val="125000"/>
-              </a:lnSpc>
-              <a:buNone/>
-            </a:pPr>
             <a:r>
               <a:rPr lang="en-US" sz="1800" dirty="0">
                 <a:solidFill>
@@ -7110,12 +6960,6 @@
               </a:rPr>
               <a:t> Then they usually face some other challenge, like a mean stepmother (Cinderella) or someone trying to hurt them (Lion King) or trying to find a treasure (Aladdin). </a:t>
             </a:r>
-            <a:pPr indent="0" marL="0">
-              <a:lnSpc>
-                <a:spcPct val="125000"/>
-              </a:lnSpc>
-              <a:buNone/>
-            </a:pPr>
             <a:r>
               <a:rPr lang="en-US" sz="1800" b="1" dirty="0">
                 <a:solidFill>
@@ -7127,12 +6971,6 @@
               </a:rPr>
               <a:t>How do they handle these challenges?</a:t>
             </a:r>
-            <a:pPr indent="0" marL="0">
-              <a:lnSpc>
-                <a:spcPct val="125000"/>
-              </a:lnSpc>
-              <a:buNone/>
-            </a:pPr>
             <a:r>
               <a:rPr lang="en-US" sz="1800" dirty="0">
                 <a:solidFill>
@@ -7144,12 +6982,6 @@
               </a:rPr>
               <a:t> Almost always someone comes along and helps them—the Fairy Godmother, Simba’s friends, the Genie. </a:t>
             </a:r>
-            <a:pPr indent="0" marL="0">
-              <a:lnSpc>
-                <a:spcPct val="125000"/>
-              </a:lnSpc>
-              <a:buNone/>
-            </a:pPr>
             <a:r>
               <a:rPr lang="en-US" sz="1800" b="1" dirty="0">
                 <a:solidFill>
@@ -7161,12 +6993,6 @@
               </a:rPr>
               <a:t>How do they help?</a:t>
             </a:r>
-            <a:pPr indent="0" marL="0">
-              <a:lnSpc>
-                <a:spcPct val="125000"/>
-              </a:lnSpc>
-              <a:buNone/>
-            </a:pPr>
             <a:r>
               <a:rPr lang="en-US" sz="1800" dirty="0">
                 <a:solidFill>
@@ -7178,12 +7004,6 @@
               </a:rPr>
               <a:t> They guide them and show them the way, but they also usually show the main character the gifts and talents they have inside of them. </a:t>
             </a:r>
-            <a:pPr indent="0" marL="0">
-              <a:lnSpc>
-                <a:spcPct val="125000"/>
-              </a:lnSpc>
-              <a:buNone/>
-            </a:pPr>
             <a:r>
               <a:rPr lang="en-US" sz="1800" dirty="0">
                 <a:solidFill>
@@ -7380,7 +7200,7 @@
       </p:sp>
       <p:pic>
         <p:nvPicPr>
-          <p:cNvPr id="5" name="Image 0" descr="/home/user/yawp/services/web-app/scripts/thesis-essay-decks/assets/icons/pencil.png">    </p:cNvPr>
+          <p:cNvPr id="5" name="Image 0" descr="pencil icon">    </p:cNvPr>
           <p:cNvPicPr>
             <a:picLocks noChangeAspect="1"/>
           </p:cNvPicPr>
@@ -7551,9 +7371,6 @@
               </a:rPr>
               <a:t>Sign in to </a:t>
             </a:r>
-            <a:pPr indent="0" marL="0">
-              <a:buNone/>
-            </a:pPr>
             <a:r>
               <a:rPr lang="en-US" sz="2000" dirty="0">
                 <a:solidFill>
@@ -7877,9 +7694,6 @@
               </a:rPr>
               <a:t>Make sure the Tutor box says </a:t>
             </a:r>
-            <a:pPr indent="0" marL="0">
-              <a:buNone/>
-            </a:pPr>
             <a:r>
               <a:rPr lang="en-US" sz="2000" dirty="0">
                 <a:solidFill>
@@ -7894,9 +7708,6 @@
               </a:rPr>
               <a:t>“Pre-Writing,”</a:t>
             </a:r>
-            <a:pPr indent="0" marL="0">
-              <a:buNone/>
-            </a:pPr>
             <a:r>
               <a:rPr lang="en-US" sz="2000" dirty="0">
                 <a:solidFill>
@@ -7948,7 +7759,7 @@
       </p:sp>
       <p:pic>
         <p:nvPicPr>
-          <p:cNvPr id="21" name="Image 1" descr="/home/user/yawp/services/web-app/scripts/thesis-essay-decks/assets/yawp-my-documents.png">    </p:cNvPr>
+          <p:cNvPr id="21" name="Image 1" descr="The My Documents list in YAWP!.">    </p:cNvPr>
           <p:cNvPicPr>
             <a:picLocks noChangeAspect="1"/>
           </p:cNvPicPr>
@@ -8157,7 +7968,7 @@
       </p:sp>
       <p:pic>
         <p:nvPicPr>
-          <p:cNvPr id="5" name="Image 0" descr="/home/user/yawp/services/web-app/scripts/thesis-essay-decks/assets/yawp-editor-prewriting.png">    </p:cNvPr>
+          <p:cNvPr id="5" name="Image 0" descr="The YAWP! editor on the Pre-writing step.">    </p:cNvPr>
           <p:cNvPicPr>
             <a:picLocks noChangeAspect="1"/>
           </p:cNvPicPr>
@@ -8303,9 +8114,6 @@
               </a:rPr>
               <a:t>Check it says </a:t>
             </a:r>
-            <a:pPr indent="0" marL="0">
-              <a:buNone/>
-            </a:pPr>
             <a:r>
               <a:rPr lang="en-US" sz="2000" dirty="0">
                 <a:solidFill>
@@ -8512,9 +8320,6 @@
               </a:rPr>
               <a:t>Written a bunch? Click </a:t>
             </a:r>
-            <a:pPr indent="0" marL="0">
-              <a:buNone/>
-            </a:pPr>
             <a:r>
               <a:rPr lang="en-US" sz="2000" dirty="0">
                 <a:solidFill>
@@ -8680,9 +8485,6 @@
               </a:rPr>
               <a:t>Figure out your </a:t>
             </a:r>
-            <a:pPr indent="0" marL="0">
-              <a:buNone/>
-            </a:pPr>
             <a:r>
               <a:rPr lang="en-US" sz="3600" dirty="0">
                 <a:solidFill>
@@ -8697,9 +8499,6 @@
               </a:rPr>
               <a:t>specific</a:t>
             </a:r>
-            <a:pPr indent="0" marL="0">
-              <a:buNone/>
-            </a:pPr>
             <a:r>
               <a:rPr lang="en-US" sz="3600" dirty="0">
                 <a:solidFill>
@@ -8742,7 +8541,7 @@
       </p:sp>
       <p:pic>
         <p:nvPicPr>
-          <p:cNvPr id="5" name="Image 0" descr="/home/user/yawp/services/web-app/scripts/thesis-essay-decks/assets/icons/lightbulb.png">    </p:cNvPr>
+          <p:cNvPr id="5" name="Image 0" descr="lightbulb icon">    </p:cNvPr>
           <p:cNvPicPr>
             <a:picLocks noChangeAspect="1"/>
           </p:cNvPicPr>
@@ -8852,12 +8651,6 @@
               </a:rPr>
               <a:t>Identify a </a:t>
             </a:r>
-            <a:pPr indent="0" marL="0">
-              <a:lnSpc>
-                <a:spcPct val="115000"/>
-              </a:lnSpc>
-              <a:buNone/>
-            </a:pPr>
             <a:r>
               <a:rPr lang="en-US" sz="4000" dirty="0">
                 <a:solidFill>
@@ -8872,12 +8665,6 @@
               </a:rPr>
               <a:t>specific</a:t>
             </a:r>
-            <a:pPr indent="0" marL="0">
-              <a:lnSpc>
-                <a:spcPct val="115000"/>
-              </a:lnSpc>
-              <a:buNone/>
-            </a:pPr>
             <a:r>
               <a:rPr lang="en-US" sz="4000" dirty="0">
                 <a:solidFill>
@@ -9755,7 +9542,7 @@
       </p:sp>
       <p:pic>
         <p:nvPicPr>
-          <p:cNvPr id="5" name="Image 0" descr="/home/user/yawp/services/web-app/scripts/thesis-essay-decks/assets/icons/pencil.png">    </p:cNvPr>
+          <p:cNvPr id="5" name="Image 0" descr="pencil icon">    </p:cNvPr>
           <p:cNvPicPr>
             <a:picLocks noChangeAspect="1"/>
           </p:cNvPicPr>
@@ -9862,9 +9649,6 @@
               </a:rPr>
               <a:t>Over the course of our sessions, you will learn how to write a </a:t>
             </a:r>
-            <a:pPr indent="0" marL="0">
-              <a:buNone/>
-            </a:pPr>
             <a:r>
               <a:rPr lang="en-US" sz="2200" dirty="0">
                 <a:solidFill>
@@ -9879,9 +9663,6 @@
               </a:rPr>
               <a:t>thoughtful, original, critical essay.</a:t>
             </a:r>
-            <a:pPr indent="0" marL="0">
-              <a:buNone/>
-            </a:pPr>
             <a:r>
               <a:rPr lang="en-US" sz="2200" dirty="0">
                 <a:solidFill>
@@ -10713,7 +10494,7 @@
       </p:sp>
       <p:pic>
         <p:nvPicPr>
-          <p:cNvPr id="9" name="Image 0" descr="/home/user/yawp/services/web-app/scripts/thesis-essay-decks/assets/icons/timer.png">    </p:cNvPr>
+          <p:cNvPr id="9" name="Image 0" descr="timer icon">    </p:cNvPr>
           <p:cNvPicPr>
             <a:picLocks noChangeAspect="1"/>
           </p:cNvPicPr>
@@ -11013,7 +10794,7 @@
       </p:sp>
       <p:pic>
         <p:nvPicPr>
-          <p:cNvPr id="5" name="Image 0" descr="/home/user/yawp/services/web-app/scripts/thesis-essay-decks/assets/icons/diamond.png">    </p:cNvPr>
+          <p:cNvPr id="5" name="Image 0" descr="diamond icon">    </p:cNvPr>
           <p:cNvPicPr>
             <a:picLocks noChangeAspect="1"/>
           </p:cNvPicPr>
@@ -11123,12 +10904,6 @@
               </a:rPr>
               <a:t>A lot of your pre-write will be rambling and might feel kind of random. But there will be parts that stand out: interesting, sharp, worthy of more discussion. </a:t>
             </a:r>
-            <a:pPr indent="0" marL="0">
-              <a:lnSpc>
-                <a:spcPct val="115000"/>
-              </a:lnSpc>
-              <a:buNone/>
-            </a:pPr>
             <a:r>
               <a:rPr lang="en-US" sz="2600" dirty="0">
                 <a:solidFill>
@@ -11143,12 +10918,6 @@
               </a:rPr>
               <a:t>These are “the diamonds,”</a:t>
             </a:r>
-            <a:pPr indent="0" marL="0">
-              <a:lnSpc>
-                <a:spcPct val="115000"/>
-              </a:lnSpc>
-              <a:buNone/>
-            </a:pPr>
             <a:r>
               <a:rPr lang="en-US" sz="2600" dirty="0">
                 <a:solidFill>
@@ -11342,7 +11111,7 @@
       </p:sp>
       <p:pic>
         <p:nvPicPr>
-          <p:cNvPr id="5" name="Image 0" descr="/home/user/yawp/services/web-app/scripts/thesis-essay-decks/assets/icons/lightbulb.png">    </p:cNvPr>
+          <p:cNvPr id="5" name="Image 0" descr="lightbulb icon">    </p:cNvPr>
           <p:cNvPicPr>
             <a:picLocks noChangeAspect="1"/>
           </p:cNvPicPr>
@@ -12221,7 +11990,7 @@
       </p:sp>
       <p:pic>
         <p:nvPicPr>
-          <p:cNvPr id="5" name="Image 0" descr="/home/user/yawp/services/web-app/scripts/thesis-essay-decks/assets/icons/question.png">    </p:cNvPr>
+          <p:cNvPr id="5" name="Image 0" descr="question icon">    </p:cNvPr>
           <p:cNvPicPr>
             <a:picLocks noChangeAspect="1"/>
           </p:cNvPicPr>
@@ -12355,7 +12124,7 @@
       </p:sp>
       <p:pic>
         <p:nvPicPr>
-          <p:cNvPr id="9" name="Image 1" descr="/home/user/yawp/services/web-app/scripts/thesis-essay-decks/assets/icons/timer.png">    </p:cNvPr>
+          <p:cNvPr id="9" name="Image 1" descr="timer icon">    </p:cNvPr>
           <p:cNvPicPr>
             <a:picLocks noChangeAspect="1"/>
           </p:cNvPicPr>
@@ -12489,7 +12258,7 @@
       </p:sp>
       <p:pic>
         <p:nvPicPr>
-          <p:cNvPr id="13" name="Image 2" descr="/home/user/yawp/services/web-app/scripts/thesis-essay-decks/assets/icons/lightbulb.png">    </p:cNvPr>
+          <p:cNvPr id="13" name="Image 2" descr="lightbulb icon">    </p:cNvPr>
           <p:cNvPicPr>
             <a:picLocks noChangeAspect="1"/>
           </p:cNvPicPr>
@@ -12767,7 +12536,7 @@
       </p:sp>
       <p:pic>
         <p:nvPicPr>
-          <p:cNvPr id="5" name="Image 0" descr="/home/user/yawp/services/web-app/scripts/thesis-essay-decks/assets/icons/eye.png">    </p:cNvPr>
+          <p:cNvPr id="5" name="Image 0" descr="eye icon">    </p:cNvPr>
           <p:cNvPicPr>
             <a:picLocks noChangeAspect="1"/>
           </p:cNvPicPr>
@@ -12875,7 +12644,7 @@
       </p:sp>
       <p:pic>
         <p:nvPicPr>
-          <p:cNvPr id="9" name="Image 1" descr="/home/user/yawp/services/web-app/scripts/thesis-essay-decks/assets/fallen-man.jpg">    </p:cNvPr>
+          <p:cNvPr id="9" name="Image 1" descr="A busy city street where a man has fallen on the pavement.">    </p:cNvPr>
           <p:cNvPicPr>
             <a:picLocks noChangeAspect="1"/>
           </p:cNvPicPr>
@@ -13140,7 +12909,7 @@
       </p:sp>
       <p:pic>
         <p:nvPicPr>
-          <p:cNvPr id="5" name="Image 0" descr="/home/user/yawp/services/web-app/scripts/thesis-essay-decks/assets/icons/question.png">    </p:cNvPr>
+          <p:cNvPr id="5" name="Image 0" descr="question icon">    </p:cNvPr>
           <p:cNvPicPr>
             <a:picLocks noChangeAspect="1"/>
           </p:cNvPicPr>
@@ -13248,7 +13017,7 @@
       </p:sp>
       <p:pic>
         <p:nvPicPr>
-          <p:cNvPr id="9" name="Image 1" descr="/home/user/yawp/services/web-app/scripts/thesis-essay-decks/assets/fallen-man.jpg">    </p:cNvPr>
+          <p:cNvPr id="9" name="Image 1" descr="A busy city street where a man has fallen on the pavement.">    </p:cNvPr>
           <p:cNvPicPr>
             <a:picLocks noChangeAspect="1"/>
           </p:cNvPicPr>
@@ -13892,7 +13661,7 @@
       </p:sp>
       <p:pic>
         <p:nvPicPr>
-          <p:cNvPr id="10" name="Image 0" descr="/home/user/yawp/services/web-app/scripts/thesis-essay-decks/assets/fallen-man.jpg">    </p:cNvPr>
+          <p:cNvPr id="10" name="Image 0" descr="A busy city street where a man has fallen on the pavement.">    </p:cNvPr>
           <p:cNvPicPr>
             <a:picLocks noChangeAspect="1"/>
           </p:cNvPicPr>
@@ -13941,7 +13710,7 @@
       </p:sp>
       <p:pic>
         <p:nvPicPr>
-          <p:cNvPr id="12" name="Image 1" descr="/home/user/yawp/services/web-app/scripts/thesis-essay-decks/assets/icons/eye.png">    </p:cNvPr>
+          <p:cNvPr id="12" name="Image 1" descr="eye icon">    </p:cNvPr>
           <p:cNvPicPr>
             <a:picLocks noChangeAspect="1"/>
           </p:cNvPicPr>
@@ -14141,7 +13910,7 @@
       </p:sp>
       <p:pic>
         <p:nvPicPr>
-          <p:cNvPr id="5" name="Image 0" descr="/home/user/yawp/services/web-app/scripts/thesis-essay-decks/assets/icons/puzzle.png">    </p:cNvPr>
+          <p:cNvPr id="5" name="Image 0" descr="puzzle icon">    </p:cNvPr>
           <p:cNvPicPr>
             <a:picLocks noChangeAspect="1"/>
           </p:cNvPicPr>
@@ -14376,12 +14145,6 @@
               </a:rPr>
               <a:t>Write an essay about </a:t>
             </a:r>
-            <a:pPr indent="0" marL="0">
-              <a:lnSpc>
-                <a:spcPct val="120000"/>
-              </a:lnSpc>
-              <a:buNone/>
-            </a:pPr>
             <a:r>
               <a:rPr lang="en-US" sz="1800" dirty="0">
                 <a:solidFill>
@@ -14396,12 +14159,6 @@
               </a:rPr>
               <a:t>a problem in your community</a:t>
             </a:r>
-            <a:pPr indent="0" marL="0">
-              <a:lnSpc>
-                <a:spcPct val="120000"/>
-              </a:lnSpc>
-              <a:buNone/>
-            </a:pPr>
             <a:r>
               <a:rPr lang="en-US" sz="1800" dirty="0">
                 <a:solidFill>
@@ -14413,12 +14170,6 @@
               </a:rPr>
               <a:t> and how we might solve it. “Community” might refer to your neighborhood, school, grade, city, state, country, age group, race, gender, or any other group you belong to. Your essay can focus on any problems that you see or feel. Use your personal experience and observations to develop your position, and evidence from your own experience to support your ideas. How do you propose we solve this problem? Your essay should be organized formally, with </a:t>
             </a:r>
-            <a:pPr indent="0" marL="0">
-              <a:lnSpc>
-                <a:spcPct val="120000"/>
-              </a:lnSpc>
-              <a:buNone/>
-            </a:pPr>
             <a:r>
               <a:rPr lang="en-US" sz="1800" dirty="0">
                 <a:solidFill>
@@ -14615,7 +14366,7 @@
       </p:sp>
       <p:pic>
         <p:nvPicPr>
-          <p:cNvPr id="5" name="Image 0" descr="/home/user/yawp/services/web-app/scripts/thesis-essay-decks/assets/icons/puzzle.png">    </p:cNvPr>
+          <p:cNvPr id="5" name="Image 0" descr="puzzle icon">    </p:cNvPr>
           <p:cNvPicPr>
             <a:picLocks noChangeAspect="1"/>
           </p:cNvPicPr>
@@ -14850,12 +14601,6 @@
               </a:rPr>
               <a:t>Write a critical essay about </a:t>
             </a:r>
-            <a:pPr indent="0" marL="0">
-              <a:lnSpc>
-                <a:spcPct val="120000"/>
-              </a:lnSpc>
-              <a:buNone/>
-            </a:pPr>
             <a:r>
               <a:rPr lang="en-US" sz="2200" dirty="0">
                 <a:solidFill>
@@ -14870,12 +14615,6 @@
               </a:rPr>
               <a:t>The Great Gatsby.</a:t>
             </a:r>
-            <a:pPr indent="0" marL="0">
-              <a:lnSpc>
-                <a:spcPct val="120000"/>
-              </a:lnSpc>
-              <a:buNone/>
-            </a:pPr>
             <a:r>
               <a:rPr lang="en-US" sz="2200" dirty="0">
                 <a:solidFill>
@@ -14887,12 +14626,6 @@
               </a:rPr>
               <a:t> You can choose </a:t>
             </a:r>
-            <a:pPr indent="0" marL="0">
-              <a:lnSpc>
-                <a:spcPct val="120000"/>
-              </a:lnSpc>
-              <a:buNone/>
-            </a:pPr>
             <a:r>
               <a:rPr lang="en-US" sz="2200" dirty="0">
                 <a:solidFill>
@@ -14907,12 +14640,6 @@
               </a:rPr>
               <a:t>any aspect of the novel that interests you.</a:t>
             </a:r>
-            <a:pPr indent="0" marL="0">
-              <a:lnSpc>
-                <a:spcPct val="120000"/>
-              </a:lnSpc>
-              <a:buNone/>
-            </a:pPr>
             <a:r>
               <a:rPr lang="en-US" sz="2200" dirty="0">
                 <a:solidFill>
@@ -14924,12 +14651,6 @@
               </a:rPr>
               <a:t> Consider the themes we’ve discussed, the characters, the settings, or anything you’ve noticed about the story that you think is worthy of discussion. Use your observations and opinions to develop your position, and quotations from the book to support your ideas. Your essay should be organized formally, with </a:t>
             </a:r>
-            <a:pPr indent="0" marL="0">
-              <a:lnSpc>
-                <a:spcPct val="120000"/>
-              </a:lnSpc>
-              <a:buNone/>
-            </a:pPr>
             <a:r>
               <a:rPr lang="en-US" sz="2200" dirty="0">
                 <a:solidFill>
@@ -15126,7 +14847,7 @@
       </p:sp>
       <p:pic>
         <p:nvPicPr>
-          <p:cNvPr id="5" name="Image 0" descr="/home/user/yawp/services/web-app/scripts/thesis-essay-decks/assets/icons/puzzle.png">    </p:cNvPr>
+          <p:cNvPr id="5" name="Image 0" descr="puzzle icon">    </p:cNvPr>
           <p:cNvPicPr>
             <a:picLocks noChangeAspect="1"/>
           </p:cNvPicPr>
@@ -15236,12 +14957,6 @@
               </a:rPr>
               <a:t>(Like the one we read together?) </a:t>
             </a:r>
-            <a:pPr indent="0" marL="0">
-              <a:lnSpc>
-                <a:spcPct val="115000"/>
-              </a:lnSpc>
-              <a:buNone/>
-            </a:pPr>
             <a:r>
               <a:rPr lang="en-US" sz="4000" dirty="0">
                 <a:solidFill>
@@ -15447,7 +15162,7 @@
       </p:sp>
       <p:pic>
         <p:nvPicPr>
-          <p:cNvPr id="5" name="Image 0" descr="/home/user/yawp/services/web-app/scripts/thesis-essay-decks/assets/critical-essay-form.png">    </p:cNvPr>
+          <p:cNvPr id="5" name="Image 0" descr="The critical essay form: introduction, body paragraphs and conclusion.">    </p:cNvPr>
           <p:cNvPicPr>
             <a:picLocks noChangeAspect="1"/>
           </p:cNvPicPr>
@@ -15596,9 +15311,6 @@
               </a:rPr>
               <a:t>Thesis statement</a:t>
             </a:r>
-            <a:pPr indent="0" marL="0">
-              <a:buNone/>
-            </a:pPr>
             <a:r>
               <a:rPr lang="en-US" sz="2400" dirty="0">
                 <a:solidFill>

--- a/services/web-app/resources/thesis-essay-decks/lesson-2-pre-writing.pptx
+++ b/services/web-app/resources/thesis-essay-decks/lesson-2-pre-writing.pptx
@@ -28,9 +28,10 @@
     <p:sldId id="276" r:id="rId22"/>
     <p:sldId id="277" r:id="rId23"/>
     <p:sldId id="278" r:id="rId24"/>
+    <p:sldId id="279" r:id="rId25"/>
   </p:sldIdLst>
   <p:notesMasterIdLst>
-    <p:notesMasterId r:id="rId25"/>
+    <p:notesMasterId r:id="rId26"/>
   </p:notesMasterIdLst>
   <p:sldSz cx="12191695" cy="6858000"/>
   <p:notesSz cx="6858000" cy="12191695"/>
@@ -1844,7 +1845,7 @@
           <a:p>
             <a:r>
               <a:rPr lang="en-US" dirty="0"/>
-              <a:t>Leave this up as they pack up. Next lesson they turn today’s diamond into a thesis statement.</a:t>
+              <a:t>The takeaway: ideas come from critical thinking plus time. Nobody gets them for free.</a:t>
             </a:r>
             <a:endParaRPr lang="en-US" dirty="0"/>
           </a:p>
@@ -1868,6 +1869,94 @@
             <a:fld id="{F7021451-1387-4CA6-816F-3879F97B5CBC}" type="slidenum">
               <a:rPr lang="en-US"/>
               <a:t>23</a:t>
+            </a:fld>
+            <a:endParaRPr lang="en-US"/>
+          </a:p>
+        </p:txBody>
+      </p:sp>
+    </p:spTree>
+    <p:extLst>
+      <p:ext uri="{BB962C8B-B14F-4D97-AF65-F5344CB8AC3E}">
+        <p14:creationId xmlns:p14="http://schemas.microsoft.com/office/powerpoint/2010/main" val="1024086991"/>
+      </p:ext>
+    </p:extLst>
+  </p:cSld>
+  <p:clrMapOvr>
+    <a:masterClrMapping/>
+  </p:clrMapOvr>
+</p:notes>
+</file>
+
+<file path=ppt/notesSlides/notesSlide24.xml><?xml version="1.0" encoding="utf-8"?>
+<p:notes xmlns:a="http://schemas.openxmlformats.org/drawingml/2006/main" xmlns:r="http://schemas.openxmlformats.org/officeDocument/2006/relationships" xmlns:p="http://schemas.openxmlformats.org/presentationml/2006/main">
+  <p:cSld>
+    <p:spTree>
+      <p:nvGrpSpPr>
+        <p:cNvPr id="1" name=""/>
+        <p:cNvGrpSpPr/>
+        <p:nvPr/>
+      </p:nvGrpSpPr>
+      <p:grpSpPr>
+        <a:xfrm>
+          <a:off x="0" y="0"/>
+          <a:ext cx="0" cy="0"/>
+          <a:chOff x="0" y="0"/>
+          <a:chExt cx="0" cy="0"/>
+        </a:xfrm>
+      </p:grpSpPr>
+      <p:sp>
+        <p:nvSpPr>
+          <p:cNvPr id="2" name="Slide Image Placeholder 1"/>
+          <p:cNvSpPr>
+            <a:spLocks noGrp="1" noRot="1" noChangeAspect="1"/>
+          </p:cNvSpPr>
+          <p:nvPr>
+            <p:ph type="sldImg"/>
+          </p:nvPr>
+        </p:nvSpPr>
+        <p:spPr/>
+      </p:sp>
+      <p:sp>
+        <p:nvSpPr>
+          <p:cNvPr id="3" name="Notes Placeholder 2"/>
+          <p:cNvSpPr>
+            <a:spLocks noGrp="1"/>
+          </p:cNvSpPr>
+          <p:nvPr>
+            <p:ph type="body" idx="1"/>
+          </p:nvPr>
+        </p:nvSpPr>
+        <p:spPr/>
+        <p:txBody>
+          <a:bodyPr/>
+          <a:lstStyle/>
+          <a:p>
+            <a:r>
+              <a:rPr lang="en-US" dirty="0"/>
+              <a:t>Leave this up as they pack up. Next lesson they turn today’s diamond into a thesis statement.</a:t>
+            </a:r>
+            <a:endParaRPr lang="en-US" dirty="0"/>
+          </a:p>
+        </p:txBody>
+      </p:sp>
+      <p:sp>
+        <p:nvSpPr>
+          <p:cNvPr id="4" name="Slide Number Placeholder 3"/>
+          <p:cNvSpPr>
+            <a:spLocks noGrp="1"/>
+          </p:cNvSpPr>
+          <p:nvPr>
+            <p:ph type="sldNum" sz="quarter" idx="10"/>
+          </p:nvPr>
+        </p:nvSpPr>
+        <p:spPr/>
+        <p:txBody>
+          <a:bodyPr/>
+          <a:lstStyle/>
+          <a:p>
+            <a:fld id="{F7021451-1387-4CA6-816F-3879F97B5CBC}" type="slidenum">
+              <a:rPr lang="en-US"/>
+              <a:t>24</a:t>
             </a:fld>
             <a:endParaRPr lang="en-US"/>
           </a:p>
@@ -3791,7 +3880,7 @@
                 <a:ea typeface="Georgia" pitchFamily="34" charset="-122"/>
                 <a:cs typeface="Georgia" pitchFamily="34" charset="-120"/>
               </a:rPr>
-              <a:t>Thesis statement = the MVP of your essay</a:t>
+              <a:t>Thesis statement = the MVP of your essay</a:t>
             </a:r>
             <a:endParaRPr lang="en-US" sz="3000" dirty="0"/>
           </a:p>
@@ -3904,8 +3993,8 @@
         </p:nvSpPr>
         <p:spPr>
           <a:xfrm>
-            <a:off x="685800" y="1965960"/>
-            <a:ext cx="3393338" cy="3749040"/>
+            <a:off x="685800" y="2218436"/>
+            <a:ext cx="3393338" cy="3609848"/>
           </a:xfrm>
           <a:prstGeom prst="roundRect">
             <a:avLst>
@@ -3938,7 +4027,7 @@
         </p:nvSpPr>
         <p:spPr>
           <a:xfrm>
-            <a:off x="813816" y="1965960"/>
+            <a:off x="813816" y="2218436"/>
             <a:ext cx="3137306" cy="91440"/>
           </a:xfrm>
           <a:prstGeom prst="rect">
@@ -3963,7 +4052,7 @@
         </p:nvSpPr>
         <p:spPr>
           <a:xfrm>
-            <a:off x="1005840" y="2331720"/>
+            <a:off x="1005840" y="2584196"/>
             <a:ext cx="731520" cy="731520"/>
           </a:xfrm>
           <a:prstGeom prst="ellipse">
@@ -3988,7 +4077,7 @@
         </p:nvSpPr>
         <p:spPr>
           <a:xfrm>
-            <a:off x="1005840" y="2331720"/>
+            <a:off x="1005840" y="2584196"/>
             <a:ext cx="731520" cy="731520"/>
           </a:xfrm>
           <a:prstGeom prst="rect">
@@ -4027,8 +4116,8 @@
         </p:nvSpPr>
         <p:spPr>
           <a:xfrm>
-            <a:off x="1005840" y="3246120"/>
-            <a:ext cx="2753258" cy="2286000"/>
+            <a:off x="1005840" y="3498596"/>
+            <a:ext cx="2753258" cy="2146808"/>
           </a:xfrm>
           <a:prstGeom prst="rect">
             <a:avLst/>
@@ -4044,7 +4133,7 @@
               <a:buNone/>
             </a:pPr>
             <a:r>
-              <a:rPr lang="en-US" sz="2300" dirty="0">
+              <a:rPr lang="en-US" sz="2800" dirty="0">
                 <a:solidFill>
                   <a:srgbClr val="3C3828"/>
                 </a:solidFill>
@@ -4054,7 +4143,7 @@
               </a:rPr>
               <a:t>Without it, your essay might be rambling and disorganized</a:t>
             </a:r>
-            <a:endParaRPr lang="en-US" sz="2300" dirty="0"/>
+            <a:endParaRPr lang="en-US" sz="2800" dirty="0"/>
           </a:p>
         </p:txBody>
       </p:sp>
@@ -4066,8 +4155,8 @@
         </p:nvSpPr>
         <p:spPr>
           <a:xfrm>
-            <a:off x="4399178" y="1965960"/>
-            <a:ext cx="3393338" cy="3749040"/>
+            <a:off x="4399178" y="2218436"/>
+            <a:ext cx="3393338" cy="3609848"/>
           </a:xfrm>
           <a:prstGeom prst="roundRect">
             <a:avLst>
@@ -4100,7 +4189,7 @@
         </p:nvSpPr>
         <p:spPr>
           <a:xfrm>
-            <a:off x="4527194" y="1965960"/>
+            <a:off x="4527194" y="2218436"/>
             <a:ext cx="3137306" cy="91440"/>
           </a:xfrm>
           <a:prstGeom prst="rect">
@@ -4125,7 +4214,7 @@
         </p:nvSpPr>
         <p:spPr>
           <a:xfrm>
-            <a:off x="4719218" y="2331720"/>
+            <a:off x="4719218" y="2584196"/>
             <a:ext cx="731520" cy="731520"/>
           </a:xfrm>
           <a:prstGeom prst="ellipse">
@@ -4150,7 +4239,7 @@
         </p:nvSpPr>
         <p:spPr>
           <a:xfrm>
-            <a:off x="4719218" y="2331720"/>
+            <a:off x="4719218" y="2584196"/>
             <a:ext cx="731520" cy="731520"/>
           </a:xfrm>
           <a:prstGeom prst="rect">
@@ -4189,8 +4278,8 @@
         </p:nvSpPr>
         <p:spPr>
           <a:xfrm>
-            <a:off x="4719218" y="3246120"/>
-            <a:ext cx="2753258" cy="2286000"/>
+            <a:off x="4719218" y="3498596"/>
+            <a:ext cx="2753258" cy="2146808"/>
           </a:xfrm>
           <a:prstGeom prst="rect">
             <a:avLst/>
@@ -4206,7 +4295,7 @@
               <a:buNone/>
             </a:pPr>
             <a:r>
-              <a:rPr lang="en-US" sz="2300" dirty="0">
+              <a:rPr lang="en-US" sz="2800" dirty="0">
                 <a:solidFill>
                   <a:srgbClr val="3C3828"/>
                 </a:solidFill>
@@ -4216,7 +4305,7 @@
               </a:rPr>
               <a:t>Great thesis statements lead to great essays</a:t>
             </a:r>
-            <a:endParaRPr lang="en-US" sz="2300" dirty="0"/>
+            <a:endParaRPr lang="en-US" sz="2800" dirty="0"/>
           </a:p>
         </p:txBody>
       </p:sp>
@@ -4228,8 +4317,8 @@
         </p:nvSpPr>
         <p:spPr>
           <a:xfrm>
-            <a:off x="8112557" y="1965960"/>
-            <a:ext cx="3393338" cy="3749040"/>
+            <a:off x="8112557" y="2218436"/>
+            <a:ext cx="3393338" cy="3609848"/>
           </a:xfrm>
           <a:prstGeom prst="roundRect">
             <a:avLst>
@@ -4262,7 +4351,7 @@
         </p:nvSpPr>
         <p:spPr>
           <a:xfrm>
-            <a:off x="8240573" y="1965960"/>
+            <a:off x="8240573" y="2218436"/>
             <a:ext cx="3137306" cy="91440"/>
           </a:xfrm>
           <a:prstGeom prst="rect">
@@ -4287,7 +4376,7 @@
         </p:nvSpPr>
         <p:spPr>
           <a:xfrm>
-            <a:off x="8432597" y="2331720"/>
+            <a:off x="8432597" y="2584196"/>
             <a:ext cx="731520" cy="731520"/>
           </a:xfrm>
           <a:prstGeom prst="ellipse">
@@ -4312,7 +4401,7 @@
         </p:nvSpPr>
         <p:spPr>
           <a:xfrm>
-            <a:off x="8432597" y="2331720"/>
+            <a:off x="8432597" y="2584196"/>
             <a:ext cx="731520" cy="731520"/>
           </a:xfrm>
           <a:prstGeom prst="rect">
@@ -4351,8 +4440,8 @@
         </p:nvSpPr>
         <p:spPr>
           <a:xfrm>
-            <a:off x="8432597" y="3246120"/>
-            <a:ext cx="2753258" cy="2286000"/>
+            <a:off x="8432597" y="3498596"/>
+            <a:ext cx="2753258" cy="2146808"/>
           </a:xfrm>
           <a:prstGeom prst="rect">
             <a:avLst/>
@@ -4368,7 +4457,7 @@
               <a:buNone/>
             </a:pPr>
             <a:r>
-              <a:rPr lang="en-US" sz="2300" dirty="0">
+              <a:rPr lang="en-US" sz="2800" dirty="0">
                 <a:solidFill>
                   <a:srgbClr val="3C3828"/>
                 </a:solidFill>
@@ -4381,7 +4470,7 @@
               </a:rPr>
               <a:t>Don’t ever start an essay until you know what you’re going to say!</a:t>
             </a:r>
-            <a:endParaRPr lang="en-US" sz="2300" dirty="0"/>
+            <a:endParaRPr lang="en-US" sz="2800" dirty="0"/>
           </a:p>
         </p:txBody>
       </p:sp>
@@ -5084,7 +5173,7 @@
                 <a:ea typeface="Georgia" pitchFamily="34" charset="-122"/>
                 <a:cs typeface="Georgia" pitchFamily="34" charset="-120"/>
               </a:rPr>
-              <a:t>The problem, and the fix</a:t>
+              <a:t>The problem, and the fix</a:t>
             </a:r>
             <a:endParaRPr lang="en-US" sz="3600" dirty="0"/>
           </a:p>
@@ -5660,7 +5749,7 @@
                 <a:ea typeface="Georgia" pitchFamily="34" charset="-122"/>
                 <a:cs typeface="Georgia" pitchFamily="34" charset="-120"/>
               </a:rPr>
-              <a:t> about a topic.</a:t>
+              <a:t> about a topic.</a:t>
             </a:r>
             <a:endParaRPr lang="en-US" sz="3000" dirty="0"/>
           </a:p>
@@ -6087,7 +6176,7 @@
         </p:nvSpPr>
         <p:spPr>
           <a:xfrm>
-            <a:off x="685800" y="502920"/>
+            <a:off x="685800" y="274320"/>
             <a:ext cx="9357055" cy="320040"/>
           </a:xfrm>
           <a:prstGeom prst="rect">
@@ -6126,8 +6215,8 @@
         </p:nvSpPr>
         <p:spPr>
           <a:xfrm>
-            <a:off x="685800" y="868680"/>
-            <a:ext cx="9357055" cy="960120"/>
+            <a:off x="685800" y="621792"/>
+            <a:ext cx="9357055" cy="640080"/>
           </a:xfrm>
           <a:prstGeom prst="rect">
             <a:avLst/>
@@ -6151,7 +6240,7 @@
                 <a:ea typeface="Georgia" pitchFamily="34" charset="-122"/>
                 <a:cs typeface="Georgia" pitchFamily="34" charset="-120"/>
               </a:rPr>
-              <a:t>Pre-write example: the Creed movies</a:t>
+              <a:t>Pre-write example: the Creed movies</a:t>
             </a:r>
             <a:endParaRPr lang="en-US" sz="3000" dirty="0"/>
           </a:p>
@@ -6264,12 +6353,12 @@
         </p:nvSpPr>
         <p:spPr>
           <a:xfrm>
-            <a:off x="685800" y="1920240"/>
-            <a:ext cx="10820095" cy="4206240"/>
+            <a:off x="685800" y="1417320"/>
+            <a:ext cx="10820095" cy="4800600"/>
           </a:xfrm>
           <a:prstGeom prst="roundRect">
             <a:avLst>
-              <a:gd name="adj" fmla="val 3043"/>
+              <a:gd name="adj" fmla="val 2667"/>
             </a:avLst>
           </a:prstGeom>
           <a:solidFill>
@@ -6298,7 +6387,7 @@
         </p:nvSpPr>
         <p:spPr>
           <a:xfrm>
-            <a:off x="813816" y="1920240"/>
+            <a:off x="813816" y="1417320"/>
             <a:ext cx="10564063" cy="91440"/>
           </a:xfrm>
           <a:prstGeom prst="rect">
@@ -6323,8 +6412,8 @@
         </p:nvSpPr>
         <p:spPr>
           <a:xfrm>
-            <a:off x="1143000" y="2240280"/>
-            <a:ext cx="9905695" cy="3657600"/>
+            <a:off x="1143000" y="1737360"/>
+            <a:ext cx="9905695" cy="4251960"/>
           </a:xfrm>
           <a:prstGeom prst="rect">
             <a:avLst/>
@@ -6338,12 +6427,12 @@
           <a:p>
             <a:pPr indent="0" marL="0">
               <a:lnSpc>
-                <a:spcPct val="125000"/>
+                <a:spcPct val="115000"/>
               </a:lnSpc>
               <a:buNone/>
             </a:pPr>
             <a:r>
-              <a:rPr lang="en-US" sz="1800" dirty="0">
+              <a:rPr lang="en-US" sz="2000" dirty="0">
                 <a:solidFill>
                   <a:srgbClr val="3C3828"/>
                 </a:solidFill>
@@ -6354,7 +6443,7 @@
               <a:t>I love the Creed movies. </a:t>
             </a:r>
             <a:r>
-              <a:rPr lang="en-US" sz="1800" b="1" dirty="0">
+              <a:rPr lang="en-US" sz="2000" b="1" dirty="0">
                 <a:solidFill>
                   <a:srgbClr val="02BDC7"/>
                 </a:solidFill>
@@ -6365,7 +6454,7 @@
               <a:t>Why?</a:t>
             </a:r>
             <a:r>
-              <a:rPr lang="en-US" sz="1800" dirty="0">
+              <a:rPr lang="en-US" sz="2000" dirty="0">
                 <a:solidFill>
                   <a:srgbClr val="3C3828"/>
                 </a:solidFill>
@@ -6376,7 +6465,7 @@
               <a:t> Because they’re amazing! </a:t>
             </a:r>
             <a:r>
-              <a:rPr lang="en-US" sz="1800" b="1" dirty="0">
+              <a:rPr lang="en-US" sz="2000" b="1" dirty="0">
                 <a:solidFill>
                   <a:srgbClr val="02BDC7"/>
                 </a:solidFill>
@@ -6387,7 +6476,7 @@
               <a:t>Why?</a:t>
             </a:r>
             <a:r>
-              <a:rPr lang="en-US" sz="1800" dirty="0">
+              <a:rPr lang="en-US" sz="2000" dirty="0">
                 <a:solidFill>
                   <a:srgbClr val="3C3828"/>
                 </a:solidFill>
@@ -6398,7 +6487,7 @@
               <a:t> They’re really uplifting. </a:t>
             </a:r>
             <a:r>
-              <a:rPr lang="en-US" sz="1800" b="1" dirty="0">
+              <a:rPr lang="en-US" sz="2000" b="1" dirty="0">
                 <a:solidFill>
                   <a:srgbClr val="02BDC7"/>
                 </a:solidFill>
@@ -6409,7 +6498,7 @@
               <a:t>How?</a:t>
             </a:r>
             <a:r>
-              <a:rPr lang="en-US" sz="1800" dirty="0">
+              <a:rPr lang="en-US" sz="2000" dirty="0">
                 <a:solidFill>
                   <a:srgbClr val="3C3828"/>
                 </a:solidFill>
@@ -6420,7 +6509,7 @@
               <a:t> In that Cinderella story, underdog way. </a:t>
             </a:r>
             <a:r>
-              <a:rPr lang="en-US" sz="1800" b="1" dirty="0">
+              <a:rPr lang="en-US" sz="2000" b="1" dirty="0">
                 <a:solidFill>
                   <a:srgbClr val="02BDC7"/>
                 </a:solidFill>
@@ -6431,7 +6520,7 @@
               <a:t>Are they uplifting in other ways?</a:t>
             </a:r>
             <a:r>
-              <a:rPr lang="en-US" sz="1800" dirty="0">
+              <a:rPr lang="en-US" sz="2000" dirty="0">
                 <a:solidFill>
                   <a:srgbClr val="3C3828"/>
                 </a:solidFill>
@@ -6442,7 +6531,7 @@
               <a:t> Yes, the love story between Adonis and Bianca is really touching, and the relationship between Adonis and Rocky is really moving. </a:t>
             </a:r>
             <a:r>
-              <a:rPr lang="en-US" sz="1800" b="1" dirty="0">
+              <a:rPr lang="en-US" sz="2000" b="1" dirty="0">
                 <a:solidFill>
                   <a:srgbClr val="02BDC7"/>
                 </a:solidFill>
@@ -6453,7 +6542,7 @@
               <a:t>So it’s more than just a sports story?</a:t>
             </a:r>
             <a:r>
-              <a:rPr lang="en-US" sz="1800" dirty="0">
+              <a:rPr lang="en-US" sz="2000" dirty="0">
                 <a:solidFill>
                   <a:srgbClr val="3C3828"/>
                 </a:solidFill>
@@ -6464,7 +6553,7 @@
               <a:t> Definitely—it’s really a movie about relationships and overcoming things. </a:t>
             </a:r>
             <a:r>
-              <a:rPr lang="en-US" sz="1800" b="1" dirty="0">
+              <a:rPr lang="en-US" sz="2000" b="1" dirty="0">
                 <a:solidFill>
                   <a:srgbClr val="02BDC7"/>
                 </a:solidFill>
@@ -6475,7 +6564,7 @@
               <a:t>Like what?</a:t>
             </a:r>
             <a:r>
-              <a:rPr lang="en-US" sz="1800" dirty="0">
+              <a:rPr lang="en-US" sz="2000" dirty="0">
                 <a:solidFill>
                   <a:srgbClr val="3C3828"/>
                 </a:solidFill>
@@ -6486,7 +6575,7 @@
               <a:t> Well, Adonis overcomes the fact that he didn’t really have a dad—Apollo Creed was not really in his life that much, even though he was this huge celebrity back in the day. </a:t>
             </a:r>
             <a:r>
-              <a:rPr lang="en-US" sz="1800" b="1" dirty="0">
+              <a:rPr lang="en-US" sz="2000" b="1" dirty="0">
                 <a:solidFill>
                   <a:srgbClr val="02BDC7"/>
                 </a:solidFill>
@@ -6497,7 +6586,7 @@
               <a:t>How does he overcome that?</a:t>
             </a:r>
             <a:r>
-              <a:rPr lang="en-US" sz="1800" dirty="0">
+              <a:rPr lang="en-US" sz="2000" dirty="0">
                 <a:solidFill>
                   <a:srgbClr val="3C3828"/>
                 </a:solidFill>
@@ -6508,7 +6597,7 @@
               <a:t> I think his relationship with Rocky becomes like the dad he never had. And Rocky is having trouble with his own son. So Rocky and Adonis both fill these father-son roles for each other. And then Adonis gets to be a dad! </a:t>
             </a:r>
             <a:r>
-              <a:rPr lang="en-US" sz="1800" dirty="0">
+              <a:rPr lang="en-US" sz="2000" dirty="0">
                 <a:solidFill>
                   <a:srgbClr val="3C3828"/>
                 </a:solidFill>
@@ -6521,7 +6610,7 @@
               </a:rPr>
               <a:t>The movies are about boxing, but they’re also about fatherhood and the power of the father-son relationship.</a:t>
             </a:r>
-            <a:endParaRPr lang="en-US" sz="1800" dirty="0"/>
+            <a:endParaRPr lang="en-US" sz="2000" dirty="0"/>
           </a:p>
         </p:txBody>
       </p:sp>
@@ -6606,7 +6695,7 @@
         </p:nvSpPr>
         <p:spPr>
           <a:xfrm>
-            <a:off x="685800" y="502920"/>
+            <a:off x="685800" y="274320"/>
             <a:ext cx="9357055" cy="320040"/>
           </a:xfrm>
           <a:prstGeom prst="rect">
@@ -6645,8 +6734,8 @@
         </p:nvSpPr>
         <p:spPr>
           <a:xfrm>
-            <a:off x="685800" y="868680"/>
-            <a:ext cx="9357055" cy="960120"/>
+            <a:off x="685800" y="621792"/>
+            <a:ext cx="9357055" cy="640080"/>
           </a:xfrm>
           <a:prstGeom prst="rect">
             <a:avLst/>
@@ -6662,7 +6751,7 @@
               <a:buNone/>
             </a:pPr>
             <a:r>
-              <a:rPr lang="en-US" sz="3600" dirty="0">
+              <a:rPr lang="en-US" sz="3200" dirty="0">
                 <a:solidFill>
                   <a:srgbClr val="3C3828"/>
                 </a:solidFill>
@@ -6670,9 +6759,9 @@
                 <a:ea typeface="Georgia" pitchFamily="34" charset="-122"/>
                 <a:cs typeface="Georgia" pitchFamily="34" charset="-120"/>
               </a:rPr>
-              <a:t>Pre-write example 2: Disney movies</a:t>
-            </a:r>
-            <a:endParaRPr lang="en-US" sz="3600" dirty="0"/>
+              <a:t>Pre-write example 2: Disney movies</a:t>
+            </a:r>
+            <a:endParaRPr lang="en-US" sz="3200" dirty="0"/>
           </a:p>
         </p:txBody>
       </p:sp>
@@ -6783,12 +6872,12 @@
         </p:nvSpPr>
         <p:spPr>
           <a:xfrm>
-            <a:off x="685800" y="1920240"/>
-            <a:ext cx="10820095" cy="4206240"/>
+            <a:off x="685800" y="1417320"/>
+            <a:ext cx="10820095" cy="4800600"/>
           </a:xfrm>
           <a:prstGeom prst="roundRect">
             <a:avLst>
-              <a:gd name="adj" fmla="val 3043"/>
+              <a:gd name="adj" fmla="val 2667"/>
             </a:avLst>
           </a:prstGeom>
           <a:solidFill>
@@ -6817,7 +6906,7 @@
         </p:nvSpPr>
         <p:spPr>
           <a:xfrm>
-            <a:off x="813816" y="1920240"/>
+            <a:off x="813816" y="1417320"/>
             <a:ext cx="10564063" cy="91440"/>
           </a:xfrm>
           <a:prstGeom prst="rect">
@@ -6842,8 +6931,8 @@
         </p:nvSpPr>
         <p:spPr>
           <a:xfrm>
-            <a:off x="1143000" y="2240280"/>
-            <a:ext cx="9905695" cy="3657600"/>
+            <a:off x="1143000" y="1737360"/>
+            <a:ext cx="9905695" cy="4251960"/>
           </a:xfrm>
           <a:prstGeom prst="rect">
             <a:avLst/>
@@ -6857,12 +6946,12 @@
           <a:p>
             <a:pPr indent="0" marL="0">
               <a:lnSpc>
-                <a:spcPct val="125000"/>
+                <a:spcPct val="115000"/>
               </a:lnSpc>
               <a:buNone/>
             </a:pPr>
             <a:r>
-              <a:rPr lang="en-US" sz="1800" dirty="0">
+              <a:rPr lang="en-US" sz="2000" dirty="0">
                 <a:solidFill>
                   <a:srgbClr val="3C3828"/>
                 </a:solidFill>
@@ -6873,7 +6962,7 @@
               <a:t>I love Disney movies. </a:t>
             </a:r>
             <a:r>
-              <a:rPr lang="en-US" sz="1800" b="1" dirty="0">
+              <a:rPr lang="en-US" sz="2000" b="1" dirty="0">
                 <a:solidFill>
                   <a:srgbClr val="FF9755"/>
                 </a:solidFill>
@@ -6884,7 +6973,7 @@
               <a:t>Why?</a:t>
             </a:r>
             <a:r>
-              <a:rPr lang="en-US" sz="1800" dirty="0">
+              <a:rPr lang="en-US" sz="2000" dirty="0">
                 <a:solidFill>
                   <a:srgbClr val="3C3828"/>
                 </a:solidFill>
@@ -6895,7 +6984,7 @@
               <a:t> They make me feel so happy! </a:t>
             </a:r>
             <a:r>
-              <a:rPr lang="en-US" sz="1800" b="1" dirty="0">
+              <a:rPr lang="en-US" sz="2000" b="1" dirty="0">
                 <a:solidFill>
                   <a:srgbClr val="FF9755"/>
                 </a:solidFill>
@@ -6906,7 +6995,7 @@
               <a:t>Why?</a:t>
             </a:r>
             <a:r>
-              <a:rPr lang="en-US" sz="1800" dirty="0">
+              <a:rPr lang="en-US" sz="2000" dirty="0">
                 <a:solidFill>
                   <a:srgbClr val="3C3828"/>
                 </a:solidFill>
@@ -6917,7 +7006,7 @@
               <a:t> I really love how in most of the stories the characters go through something hard and challenging. </a:t>
             </a:r>
             <a:r>
-              <a:rPr lang="en-US" sz="1800" b="1" dirty="0">
+              <a:rPr lang="en-US" sz="2000" b="1" dirty="0">
                 <a:solidFill>
                   <a:srgbClr val="FF9755"/>
                 </a:solidFill>
@@ -6928,7 +7017,7 @@
               <a:t>Like what?</a:t>
             </a:r>
             <a:r>
-              <a:rPr lang="en-US" sz="1800" dirty="0">
+              <a:rPr lang="en-US" sz="2000" dirty="0">
                 <a:solidFill>
                   <a:srgbClr val="3C3828"/>
                 </a:solidFill>
@@ -6939,7 +7028,7 @@
               <a:t> In a lot of them, they lose a parent early in the movie. This leaves them feeling sad and alone. </a:t>
             </a:r>
             <a:r>
-              <a:rPr lang="en-US" sz="1800" b="1" dirty="0">
+              <a:rPr lang="en-US" sz="2000" b="1" dirty="0">
                 <a:solidFill>
                   <a:srgbClr val="FF9755"/>
                 </a:solidFill>
@@ -6950,7 +7039,7 @@
               <a:t>Then what happens?</a:t>
             </a:r>
             <a:r>
-              <a:rPr lang="en-US" sz="1800" dirty="0">
+              <a:rPr lang="en-US" sz="2000" dirty="0">
                 <a:solidFill>
                   <a:srgbClr val="3C3828"/>
                 </a:solidFill>
@@ -6961,7 +7050,7 @@
               <a:t> Then they usually face some other challenge, like a mean stepmother (Cinderella) or someone trying to hurt them (Lion King) or trying to find a treasure (Aladdin). </a:t>
             </a:r>
             <a:r>
-              <a:rPr lang="en-US" sz="1800" b="1" dirty="0">
+              <a:rPr lang="en-US" sz="2000" b="1" dirty="0">
                 <a:solidFill>
                   <a:srgbClr val="FF9755"/>
                 </a:solidFill>
@@ -6972,7 +7061,7 @@
               <a:t>How do they handle these challenges?</a:t>
             </a:r>
             <a:r>
-              <a:rPr lang="en-US" sz="1800" dirty="0">
+              <a:rPr lang="en-US" sz="2000" dirty="0">
                 <a:solidFill>
                   <a:srgbClr val="3C3828"/>
                 </a:solidFill>
@@ -6983,7 +7072,7 @@
               <a:t> Almost always someone comes along and helps them—the Fairy Godmother, Simba’s friends, the Genie. </a:t>
             </a:r>
             <a:r>
-              <a:rPr lang="en-US" sz="1800" b="1" dirty="0">
+              <a:rPr lang="en-US" sz="2000" b="1" dirty="0">
                 <a:solidFill>
                   <a:srgbClr val="FF9755"/>
                 </a:solidFill>
@@ -6994,7 +7083,7 @@
               <a:t>How do they help?</a:t>
             </a:r>
             <a:r>
-              <a:rPr lang="en-US" sz="1800" dirty="0">
+              <a:rPr lang="en-US" sz="2000" dirty="0">
                 <a:solidFill>
                   <a:srgbClr val="3C3828"/>
                 </a:solidFill>
@@ -7005,7 +7094,7 @@
               <a:t> They guide them and show them the way, but they also usually show the main character the gifts and talents they have inside of them. </a:t>
             </a:r>
             <a:r>
-              <a:rPr lang="en-US" sz="1800" dirty="0">
+              <a:rPr lang="en-US" sz="2000" dirty="0">
                 <a:solidFill>
                   <a:srgbClr val="3C3828"/>
                 </a:solidFill>
@@ -7018,7 +7107,7 @@
               </a:rPr>
               <a:t>That’s interesting—the main character is the hero, but they almost always need a helper character to show them their hero qualities.</a:t>
             </a:r>
-            <a:endParaRPr lang="en-US" sz="1800" dirty="0"/>
+            <a:endParaRPr lang="en-US" sz="2000" dirty="0"/>
           </a:p>
         </p:txBody>
       </p:sp>
@@ -7167,7 +7256,7 @@
                 <a:ea typeface="Georgia" pitchFamily="34" charset="-122"/>
                 <a:cs typeface="Georgia" pitchFamily="34" charset="-120"/>
               </a:rPr>
-              <a:t>Open YAWP! and start pre-writing</a:t>
+              <a:t>Open YAWP! and start pre-writing</a:t>
             </a:r>
             <a:endParaRPr lang="en-US" sz="3600" dirty="0"/>
           </a:p>
@@ -7345,7 +7434,7 @@
         <p:spPr>
           <a:xfrm>
             <a:off x="1417320" y="1965960"/>
-            <a:ext cx="4449928" cy="822960"/>
+            <a:ext cx="4449928" cy="685800"/>
           </a:xfrm>
           <a:prstGeom prst="rect">
             <a:avLst/>
@@ -7462,7 +7551,7 @@
         <p:spPr>
           <a:xfrm>
             <a:off x="7055968" y="1965960"/>
-            <a:ext cx="4449928" cy="822960"/>
+            <a:ext cx="4449928" cy="685800"/>
           </a:xfrm>
           <a:prstGeom prst="rect">
             <a:avLst/>
@@ -7500,7 +7589,7 @@
         </p:nvSpPr>
         <p:spPr>
           <a:xfrm>
-            <a:off x="685800" y="2944368"/>
+            <a:off x="685800" y="2807208"/>
             <a:ext cx="548640" cy="548640"/>
           </a:xfrm>
           <a:prstGeom prst="ellipse">
@@ -7525,7 +7614,7 @@
         </p:nvSpPr>
         <p:spPr>
           <a:xfrm>
-            <a:off x="685800" y="2944368"/>
+            <a:off x="685800" y="2807208"/>
             <a:ext cx="548640" cy="548640"/>
           </a:xfrm>
           <a:prstGeom prst="rect">
@@ -7564,8 +7653,8 @@
         </p:nvSpPr>
         <p:spPr>
           <a:xfrm>
-            <a:off x="1417320" y="2834640"/>
-            <a:ext cx="4449928" cy="822960"/>
+            <a:off x="1417320" y="2697480"/>
+            <a:ext cx="4449928" cy="685800"/>
           </a:xfrm>
           <a:prstGeom prst="rect">
             <a:avLst/>
@@ -7603,7 +7692,7 @@
         </p:nvSpPr>
         <p:spPr>
           <a:xfrm>
-            <a:off x="6324448" y="2944368"/>
+            <a:off x="6324448" y="2807208"/>
             <a:ext cx="548640" cy="548640"/>
           </a:xfrm>
           <a:prstGeom prst="ellipse">
@@ -7628,7 +7717,7 @@
         </p:nvSpPr>
         <p:spPr>
           <a:xfrm>
-            <a:off x="6324448" y="2944368"/>
+            <a:off x="6324448" y="2807208"/>
             <a:ext cx="548640" cy="548640"/>
           </a:xfrm>
           <a:prstGeom prst="rect">
@@ -7667,8 +7756,8 @@
         </p:nvSpPr>
         <p:spPr>
           <a:xfrm>
-            <a:off x="7055968" y="2834640"/>
-            <a:ext cx="4449928" cy="822960"/>
+            <a:off x="7055968" y="2697480"/>
+            <a:ext cx="4449928" cy="685800"/>
           </a:xfrm>
           <a:prstGeom prst="rect">
             <a:avLst/>
@@ -7731,12 +7820,12 @@
         </p:nvSpPr>
         <p:spPr>
           <a:xfrm>
-            <a:off x="2480462" y="3931920"/>
-            <a:ext cx="7230771" cy="2148840"/>
+            <a:off x="1638102" y="3611880"/>
+            <a:ext cx="8915491" cy="2606040"/>
           </a:xfrm>
           <a:prstGeom prst="roundRect">
             <a:avLst>
-              <a:gd name="adj" fmla="val 5957"/>
+              <a:gd name="adj" fmla="val 4912"/>
             </a:avLst>
           </a:prstGeom>
           <a:solidFill>
@@ -7773,8 +7862,8 @@
         </p:blipFill>
         <p:spPr>
           <a:xfrm>
-            <a:off x="2608478" y="4059936"/>
-            <a:ext cx="6974739" cy="1892808"/>
+            <a:off x="1766118" y="3739896"/>
+            <a:ext cx="8659459" cy="2350008"/>
           </a:xfrm>
           <a:prstGeom prst="rect">
             <a:avLst/>
@@ -7862,7 +7951,7 @@
         </p:nvSpPr>
         <p:spPr>
           <a:xfrm>
-            <a:off x="685800" y="502920"/>
+            <a:off x="685800" y="274320"/>
             <a:ext cx="9357055" cy="320040"/>
           </a:xfrm>
           <a:prstGeom prst="rect">
@@ -7901,8 +7990,8 @@
         </p:nvSpPr>
         <p:spPr>
           <a:xfrm>
-            <a:off x="685800" y="868680"/>
-            <a:ext cx="9357055" cy="960120"/>
+            <a:off x="685800" y="621792"/>
+            <a:ext cx="9357055" cy="640080"/>
           </a:xfrm>
           <a:prstGeom prst="rect">
             <a:avLst/>
@@ -7918,7 +8007,7 @@
               <a:buNone/>
             </a:pPr>
             <a:r>
-              <a:rPr lang="en-US" sz="3600" dirty="0">
+              <a:rPr lang="en-US" sz="3200" dirty="0">
                 <a:solidFill>
                   <a:srgbClr val="3C3828"/>
                 </a:solidFill>
@@ -7926,9 +8015,9 @@
                 <a:ea typeface="Georgia" pitchFamily="34" charset="-122"/>
                 <a:cs typeface="Georgia" pitchFamily="34" charset="-120"/>
               </a:rPr>
-              <a:t>What it looks like</a:t>
-            </a:r>
-            <a:endParaRPr lang="en-US" sz="3600" dirty="0"/>
+              <a:t>What it looks like</a:t>
+            </a:r>
+            <a:endParaRPr lang="en-US" sz="3200" dirty="0"/>
           </a:p>
         </p:txBody>
       </p:sp>
@@ -7940,12 +8029,12 @@
         </p:nvSpPr>
         <p:spPr>
           <a:xfrm>
-            <a:off x="685800" y="1828800"/>
-            <a:ext cx="6949440" cy="4150360"/>
+            <a:off x="685800" y="1596904"/>
+            <a:ext cx="7436815" cy="4441431"/>
           </a:xfrm>
           <a:prstGeom prst="roundRect">
             <a:avLst>
-              <a:gd name="adj" fmla="val 3084"/>
+              <a:gd name="adj" fmla="val 2882"/>
             </a:avLst>
           </a:prstGeom>
           <a:solidFill>
@@ -7982,8 +8071,8 @@
         </p:blipFill>
         <p:spPr>
           <a:xfrm>
-            <a:off x="813816" y="1956816"/>
-            <a:ext cx="6693408" cy="3894328"/>
+            <a:off x="813816" y="1724920"/>
+            <a:ext cx="7180783" cy="4185399"/>
           </a:xfrm>
           <a:prstGeom prst="rect">
             <a:avLst/>
@@ -7998,8 +8087,8 @@
         </p:nvSpPr>
         <p:spPr>
           <a:xfrm>
-            <a:off x="8183880" y="2231136"/>
-            <a:ext cx="292608" cy="292608"/>
+            <a:off x="2344508" y="2333400"/>
+            <a:ext cx="457200" cy="457200"/>
           </a:xfrm>
           <a:prstGeom prst="ellipse">
             <a:avLst/>
@@ -8007,12 +8096,19 @@
           <a:solidFill>
             <a:srgbClr val="FFB600"/>
           </a:solidFill>
-          <a:ln w="12700">
-            <a:solidFill>
-              <a:srgbClr val="FFB600"/>
-            </a:solidFill>
-            <a:prstDash val="solid"/>
-          </a:ln>
+          <a:ln w="25400">
+            <a:solidFill>
+              <a:srgbClr val="FFFEFA"/>
+            </a:solidFill>
+            <a:prstDash val="solid"/>
+          </a:ln>
+          <a:effectLst>
+            <a:outerShdw sx="100000" sy="100000" kx="0" ky="0" algn="bl" rotWithShape="0" blurRad="50800" dist="19050" dir="5400000">
+              <a:srgbClr val="3C3828">
+                <a:alpha val="25000"/>
+              </a:srgbClr>
+            </a:outerShdw>
+          </a:effectLst>
         </p:spPr>
       </p:sp>
       <p:sp>
@@ -8023,8 +8119,402 @@
         </p:nvSpPr>
         <p:spPr>
           <a:xfrm>
-            <a:off x="8659368" y="1965960"/>
-            <a:ext cx="2846527" cy="822960"/>
+            <a:off x="2344508" y="2333400"/>
+            <a:ext cx="457200" cy="457200"/>
+          </a:xfrm>
+          <a:prstGeom prst="rect">
+            <a:avLst/>
+          </a:prstGeom>
+          <a:noFill/>
+          <a:ln/>
+        </p:spPr>
+        <p:txBody>
+          <a:bodyPr wrap="square" lIns="0" tIns="0" rIns="0" bIns="0" rtlCol="0" anchor="ctr"/>
+          <a:lstStyle/>
+          <a:p>
+            <a:pPr algn="ctr" indent="0" marL="0">
+              <a:buNone/>
+            </a:pPr>
+            <a:r>
+              <a:rPr lang="en-US" sz="1800" b="1" dirty="0">
+                <a:solidFill>
+                  <a:srgbClr val="FFFEFA"/>
+                </a:solidFill>
+                <a:latin typeface="Georgia" pitchFamily="34" charset="0"/>
+                <a:ea typeface="Georgia" pitchFamily="34" charset="-122"/>
+                <a:cs typeface="Georgia" pitchFamily="34" charset="-120"/>
+              </a:rPr>
+              <a:t>1</a:t>
+            </a:r>
+            <a:endParaRPr lang="en-US" sz="1800" dirty="0"/>
+          </a:p>
+        </p:txBody>
+      </p:sp>
+      <p:sp>
+        <p:nvSpPr>
+          <p:cNvPr id="8" name="Shape 5"/>
+          <p:cNvSpPr/>
+          <p:nvPr/>
+        </p:nvSpPr>
+        <p:spPr>
+          <a:xfrm>
+            <a:off x="1626430" y="1822781"/>
+            <a:ext cx="457200" cy="457200"/>
+          </a:xfrm>
+          <a:prstGeom prst="ellipse">
+            <a:avLst/>
+          </a:prstGeom>
+          <a:solidFill>
+            <a:srgbClr val="FC4540"/>
+          </a:solidFill>
+          <a:ln w="25400">
+            <a:solidFill>
+              <a:srgbClr val="FFFEFA"/>
+            </a:solidFill>
+            <a:prstDash val="solid"/>
+          </a:ln>
+          <a:effectLst>
+            <a:outerShdw sx="100000" sy="100000" kx="0" ky="0" algn="bl" rotWithShape="0" blurRad="50800" dist="19050" dir="5400000">
+              <a:srgbClr val="3C3828">
+                <a:alpha val="25000"/>
+              </a:srgbClr>
+            </a:outerShdw>
+          </a:effectLst>
+        </p:spPr>
+      </p:sp>
+      <p:sp>
+        <p:nvSpPr>
+          <p:cNvPr id="9" name="Text 6"/>
+          <p:cNvSpPr/>
+          <p:nvPr/>
+        </p:nvSpPr>
+        <p:spPr>
+          <a:xfrm>
+            <a:off x="1626430" y="1822781"/>
+            <a:ext cx="457200" cy="457200"/>
+          </a:xfrm>
+          <a:prstGeom prst="rect">
+            <a:avLst/>
+          </a:prstGeom>
+          <a:noFill/>
+          <a:ln/>
+        </p:spPr>
+        <p:txBody>
+          <a:bodyPr wrap="square" lIns="0" tIns="0" rIns="0" bIns="0" rtlCol="0" anchor="ctr"/>
+          <a:lstStyle/>
+          <a:p>
+            <a:pPr algn="ctr" indent="0" marL="0">
+              <a:buNone/>
+            </a:pPr>
+            <a:r>
+              <a:rPr lang="en-US" sz="1800" b="1" dirty="0">
+                <a:solidFill>
+                  <a:srgbClr val="FFFEFA"/>
+                </a:solidFill>
+                <a:latin typeface="Georgia" pitchFamily="34" charset="0"/>
+                <a:ea typeface="Georgia" pitchFamily="34" charset="-122"/>
+                <a:cs typeface="Georgia" pitchFamily="34" charset="-120"/>
+              </a:rPr>
+              <a:t>2</a:t>
+            </a:r>
+            <a:endParaRPr lang="en-US" sz="1800" dirty="0"/>
+          </a:p>
+        </p:txBody>
+      </p:sp>
+      <p:sp>
+        <p:nvSpPr>
+          <p:cNvPr id="10" name="Shape 7"/>
+          <p:cNvSpPr/>
+          <p:nvPr/>
+        </p:nvSpPr>
+        <p:spPr>
+          <a:xfrm>
+            <a:off x="4175608" y="3798290"/>
+            <a:ext cx="457200" cy="457200"/>
+          </a:xfrm>
+          <a:prstGeom prst="ellipse">
+            <a:avLst/>
+          </a:prstGeom>
+          <a:solidFill>
+            <a:srgbClr val="FF9755"/>
+          </a:solidFill>
+          <a:ln w="25400">
+            <a:solidFill>
+              <a:srgbClr val="FFFEFA"/>
+            </a:solidFill>
+            <a:prstDash val="solid"/>
+          </a:ln>
+          <a:effectLst>
+            <a:outerShdw sx="100000" sy="100000" kx="0" ky="0" algn="bl" rotWithShape="0" blurRad="50800" dist="19050" dir="5400000">
+              <a:srgbClr val="3C3828">
+                <a:alpha val="25000"/>
+              </a:srgbClr>
+            </a:outerShdw>
+          </a:effectLst>
+        </p:spPr>
+      </p:sp>
+      <p:sp>
+        <p:nvSpPr>
+          <p:cNvPr id="11" name="Text 8"/>
+          <p:cNvSpPr/>
+          <p:nvPr/>
+        </p:nvSpPr>
+        <p:spPr>
+          <a:xfrm>
+            <a:off x="4175608" y="3798290"/>
+            <a:ext cx="457200" cy="457200"/>
+          </a:xfrm>
+          <a:prstGeom prst="rect">
+            <a:avLst/>
+          </a:prstGeom>
+          <a:noFill/>
+          <a:ln/>
+        </p:spPr>
+        <p:txBody>
+          <a:bodyPr wrap="square" lIns="0" tIns="0" rIns="0" bIns="0" rtlCol="0" anchor="ctr"/>
+          <a:lstStyle/>
+          <a:p>
+            <a:pPr algn="ctr" indent="0" marL="0">
+              <a:buNone/>
+            </a:pPr>
+            <a:r>
+              <a:rPr lang="en-US" sz="1800" b="1" dirty="0">
+                <a:solidFill>
+                  <a:srgbClr val="FFFEFA"/>
+                </a:solidFill>
+                <a:latin typeface="Georgia" pitchFamily="34" charset="0"/>
+                <a:ea typeface="Georgia" pitchFamily="34" charset="-122"/>
+                <a:cs typeface="Georgia" pitchFamily="34" charset="-120"/>
+              </a:rPr>
+              <a:t>3</a:t>
+            </a:r>
+            <a:endParaRPr lang="en-US" sz="1800" dirty="0"/>
+          </a:p>
+        </p:txBody>
+      </p:sp>
+      <p:sp>
+        <p:nvSpPr>
+          <p:cNvPr id="12" name="Shape 9"/>
+          <p:cNvSpPr/>
+          <p:nvPr/>
+        </p:nvSpPr>
+        <p:spPr>
+          <a:xfrm>
+            <a:off x="6760690" y="2542670"/>
+            <a:ext cx="457200" cy="457200"/>
+          </a:xfrm>
+          <a:prstGeom prst="ellipse">
+            <a:avLst/>
+          </a:prstGeom>
+          <a:solidFill>
+            <a:srgbClr val="FC4067"/>
+          </a:solidFill>
+          <a:ln w="25400">
+            <a:solidFill>
+              <a:srgbClr val="FFFEFA"/>
+            </a:solidFill>
+            <a:prstDash val="solid"/>
+          </a:ln>
+          <a:effectLst>
+            <a:outerShdw sx="100000" sy="100000" kx="0" ky="0" algn="bl" rotWithShape="0" blurRad="50800" dist="19050" dir="5400000">
+              <a:srgbClr val="3C3828">
+                <a:alpha val="25000"/>
+              </a:srgbClr>
+            </a:outerShdw>
+          </a:effectLst>
+        </p:spPr>
+      </p:sp>
+      <p:sp>
+        <p:nvSpPr>
+          <p:cNvPr id="13" name="Text 10"/>
+          <p:cNvSpPr/>
+          <p:nvPr/>
+        </p:nvSpPr>
+        <p:spPr>
+          <a:xfrm>
+            <a:off x="6760690" y="2542670"/>
+            <a:ext cx="457200" cy="457200"/>
+          </a:xfrm>
+          <a:prstGeom prst="rect">
+            <a:avLst/>
+          </a:prstGeom>
+          <a:noFill/>
+          <a:ln/>
+        </p:spPr>
+        <p:txBody>
+          <a:bodyPr wrap="square" lIns="0" tIns="0" rIns="0" bIns="0" rtlCol="0" anchor="ctr"/>
+          <a:lstStyle/>
+          <a:p>
+            <a:pPr algn="ctr" indent="0" marL="0">
+              <a:buNone/>
+            </a:pPr>
+            <a:r>
+              <a:rPr lang="en-US" sz="1800" b="1" dirty="0">
+                <a:solidFill>
+                  <a:srgbClr val="FFFEFA"/>
+                </a:solidFill>
+                <a:latin typeface="Georgia" pitchFamily="34" charset="0"/>
+                <a:ea typeface="Georgia" pitchFamily="34" charset="-122"/>
+                <a:cs typeface="Georgia" pitchFamily="34" charset="-120"/>
+              </a:rPr>
+              <a:t>4</a:t>
+            </a:r>
+            <a:endParaRPr lang="en-US" sz="1800" dirty="0"/>
+          </a:p>
+        </p:txBody>
+      </p:sp>
+      <p:sp>
+        <p:nvSpPr>
+          <p:cNvPr id="14" name="Shape 11"/>
+          <p:cNvSpPr/>
+          <p:nvPr/>
+        </p:nvSpPr>
+        <p:spPr>
+          <a:xfrm>
+            <a:off x="1734141" y="5459893"/>
+            <a:ext cx="457200" cy="457200"/>
+          </a:xfrm>
+          <a:prstGeom prst="ellipse">
+            <a:avLst/>
+          </a:prstGeom>
+          <a:solidFill>
+            <a:srgbClr val="02BDC7"/>
+          </a:solidFill>
+          <a:ln w="25400">
+            <a:solidFill>
+              <a:srgbClr val="FFFEFA"/>
+            </a:solidFill>
+            <a:prstDash val="solid"/>
+          </a:ln>
+          <a:effectLst>
+            <a:outerShdw sx="100000" sy="100000" kx="0" ky="0" algn="bl" rotWithShape="0" blurRad="50800" dist="19050" dir="5400000">
+              <a:srgbClr val="3C3828">
+                <a:alpha val="25000"/>
+              </a:srgbClr>
+            </a:outerShdw>
+          </a:effectLst>
+        </p:spPr>
+      </p:sp>
+      <p:sp>
+        <p:nvSpPr>
+          <p:cNvPr id="15" name="Text 12"/>
+          <p:cNvSpPr/>
+          <p:nvPr/>
+        </p:nvSpPr>
+        <p:spPr>
+          <a:xfrm>
+            <a:off x="1734141" y="5459893"/>
+            <a:ext cx="457200" cy="457200"/>
+          </a:xfrm>
+          <a:prstGeom prst="rect">
+            <a:avLst/>
+          </a:prstGeom>
+          <a:noFill/>
+          <a:ln/>
+        </p:spPr>
+        <p:txBody>
+          <a:bodyPr wrap="square" lIns="0" tIns="0" rIns="0" bIns="0" rtlCol="0" anchor="ctr"/>
+          <a:lstStyle/>
+          <a:p>
+            <a:pPr algn="ctr" indent="0" marL="0">
+              <a:buNone/>
+            </a:pPr>
+            <a:r>
+              <a:rPr lang="en-US" sz="1800" b="1" dirty="0">
+                <a:solidFill>
+                  <a:srgbClr val="FFFEFA"/>
+                </a:solidFill>
+                <a:latin typeface="Georgia" pitchFamily="34" charset="0"/>
+                <a:ea typeface="Georgia" pitchFamily="34" charset="-122"/>
+                <a:cs typeface="Georgia" pitchFamily="34" charset="-120"/>
+              </a:rPr>
+              <a:t>5</a:t>
+            </a:r>
+            <a:endParaRPr lang="en-US" sz="1800" dirty="0"/>
+          </a:p>
+        </p:txBody>
+      </p:sp>
+      <p:sp>
+        <p:nvSpPr>
+          <p:cNvPr id="16" name="Shape 13"/>
+          <p:cNvSpPr/>
+          <p:nvPr/>
+        </p:nvSpPr>
+        <p:spPr>
+          <a:xfrm>
+            <a:off x="8579815" y="1924812"/>
+            <a:ext cx="457200" cy="457200"/>
+          </a:xfrm>
+          <a:prstGeom prst="ellipse">
+            <a:avLst/>
+          </a:prstGeom>
+          <a:solidFill>
+            <a:srgbClr val="FFB600"/>
+          </a:solidFill>
+          <a:ln w="25400">
+            <a:solidFill>
+              <a:srgbClr val="FFFEFA"/>
+            </a:solidFill>
+            <a:prstDash val="solid"/>
+          </a:ln>
+          <a:effectLst>
+            <a:outerShdw sx="100000" sy="100000" kx="0" ky="0" algn="bl" rotWithShape="0" blurRad="50800" dist="19050" dir="5400000">
+              <a:srgbClr val="3C3828">
+                <a:alpha val="25000"/>
+              </a:srgbClr>
+            </a:outerShdw>
+          </a:effectLst>
+        </p:spPr>
+      </p:sp>
+      <p:sp>
+        <p:nvSpPr>
+          <p:cNvPr id="17" name="Text 14"/>
+          <p:cNvSpPr/>
+          <p:nvPr/>
+        </p:nvSpPr>
+        <p:spPr>
+          <a:xfrm>
+            <a:off x="8579815" y="1924812"/>
+            <a:ext cx="457200" cy="457200"/>
+          </a:xfrm>
+          <a:prstGeom prst="rect">
+            <a:avLst/>
+          </a:prstGeom>
+          <a:noFill/>
+          <a:ln/>
+        </p:spPr>
+        <p:txBody>
+          <a:bodyPr wrap="square" lIns="0" tIns="0" rIns="0" bIns="0" rtlCol="0" anchor="ctr"/>
+          <a:lstStyle/>
+          <a:p>
+            <a:pPr algn="ctr" indent="0" marL="0">
+              <a:buNone/>
+            </a:pPr>
+            <a:r>
+              <a:rPr lang="en-US" sz="1800" b="1" dirty="0">
+                <a:solidFill>
+                  <a:srgbClr val="FFFEFA"/>
+                </a:solidFill>
+                <a:latin typeface="Georgia" pitchFamily="34" charset="0"/>
+                <a:ea typeface="Georgia" pitchFamily="34" charset="-122"/>
+                <a:cs typeface="Georgia" pitchFamily="34" charset="-120"/>
+              </a:rPr>
+              <a:t>1</a:t>
+            </a:r>
+            <a:endParaRPr lang="en-US" sz="1800" dirty="0"/>
+          </a:p>
+        </p:txBody>
+      </p:sp>
+      <p:sp>
+        <p:nvSpPr>
+          <p:cNvPr id="18" name="Text 15"/>
+          <p:cNvSpPr/>
+          <p:nvPr/>
+        </p:nvSpPr>
+        <p:spPr>
+          <a:xfrm>
+            <a:off x="9219895" y="1737360"/>
+            <a:ext cx="2286000" cy="832104"/>
           </a:xfrm>
           <a:prstGeom prst="rect">
             <a:avLst/>
@@ -8040,7 +8530,7 @@
               <a:buNone/>
             </a:pPr>
             <a:r>
-              <a:rPr lang="en-US" sz="2000" dirty="0">
+              <a:rPr lang="en-US" sz="1800" dirty="0">
                 <a:solidFill>
                   <a:srgbClr val="3C3828"/>
                 </a:solidFill>
@@ -8050,20 +8540,20 @@
               </a:rPr>
               <a:t>The Tutor is on the left</a:t>
             </a:r>
-            <a:endParaRPr lang="en-US" sz="2000" dirty="0"/>
-          </a:p>
-        </p:txBody>
-      </p:sp>
-      <p:sp>
-        <p:nvSpPr>
-          <p:cNvPr id="8" name="Shape 5"/>
-          <p:cNvSpPr/>
-          <p:nvPr/>
-        </p:nvSpPr>
-        <p:spPr>
-          <a:xfrm>
-            <a:off x="8183880" y="3054096"/>
-            <a:ext cx="292608" cy="292608"/>
+            <a:endParaRPr lang="en-US" sz="1800" dirty="0"/>
+          </a:p>
+        </p:txBody>
+      </p:sp>
+      <p:sp>
+        <p:nvSpPr>
+          <p:cNvPr id="19" name="Shape 16"/>
+          <p:cNvSpPr/>
+          <p:nvPr/>
+        </p:nvSpPr>
+        <p:spPr>
+          <a:xfrm>
+            <a:off x="8579815" y="2756916"/>
+            <a:ext cx="457200" cy="457200"/>
           </a:xfrm>
           <a:prstGeom prst="ellipse">
             <a:avLst/>
@@ -8071,24 +8561,70 @@
           <a:solidFill>
             <a:srgbClr val="FC4540"/>
           </a:solidFill>
-          <a:ln w="12700">
-            <a:solidFill>
-              <a:srgbClr val="FC4540"/>
-            </a:solidFill>
-            <a:prstDash val="solid"/>
-          </a:ln>
-        </p:spPr>
-      </p:sp>
-      <p:sp>
-        <p:nvSpPr>
-          <p:cNvPr id="9" name="Text 6"/>
-          <p:cNvSpPr/>
-          <p:nvPr/>
-        </p:nvSpPr>
-        <p:spPr>
-          <a:xfrm>
-            <a:off x="8659368" y="2788920"/>
-            <a:ext cx="2846527" cy="822960"/>
+          <a:ln w="25400">
+            <a:solidFill>
+              <a:srgbClr val="FFFEFA"/>
+            </a:solidFill>
+            <a:prstDash val="solid"/>
+          </a:ln>
+          <a:effectLst>
+            <a:outerShdw sx="100000" sy="100000" kx="0" ky="0" algn="bl" rotWithShape="0" blurRad="50800" dist="19050" dir="5400000">
+              <a:srgbClr val="3C3828">
+                <a:alpha val="25000"/>
+              </a:srgbClr>
+            </a:outerShdw>
+          </a:effectLst>
+        </p:spPr>
+      </p:sp>
+      <p:sp>
+        <p:nvSpPr>
+          <p:cNvPr id="20" name="Text 17"/>
+          <p:cNvSpPr/>
+          <p:nvPr/>
+        </p:nvSpPr>
+        <p:spPr>
+          <a:xfrm>
+            <a:off x="8579815" y="2756916"/>
+            <a:ext cx="457200" cy="457200"/>
+          </a:xfrm>
+          <a:prstGeom prst="rect">
+            <a:avLst/>
+          </a:prstGeom>
+          <a:noFill/>
+          <a:ln/>
+        </p:spPr>
+        <p:txBody>
+          <a:bodyPr wrap="square" lIns="0" tIns="0" rIns="0" bIns="0" rtlCol="0" anchor="ctr"/>
+          <a:lstStyle/>
+          <a:p>
+            <a:pPr algn="ctr" indent="0" marL="0">
+              <a:buNone/>
+            </a:pPr>
+            <a:r>
+              <a:rPr lang="en-US" sz="1800" b="1" dirty="0">
+                <a:solidFill>
+                  <a:srgbClr val="FFFEFA"/>
+                </a:solidFill>
+                <a:latin typeface="Georgia" pitchFamily="34" charset="0"/>
+                <a:ea typeface="Georgia" pitchFamily="34" charset="-122"/>
+                <a:cs typeface="Georgia" pitchFamily="34" charset="-120"/>
+              </a:rPr>
+              <a:t>2</a:t>
+            </a:r>
+            <a:endParaRPr lang="en-US" sz="1800" dirty="0"/>
+          </a:p>
+        </p:txBody>
+      </p:sp>
+      <p:sp>
+        <p:nvSpPr>
+          <p:cNvPr id="21" name="Text 18"/>
+          <p:cNvSpPr/>
+          <p:nvPr/>
+        </p:nvSpPr>
+        <p:spPr>
+          <a:xfrm>
+            <a:off x="9219895" y="2569464"/>
+            <a:ext cx="2286000" cy="832104"/>
           </a:xfrm>
           <a:prstGeom prst="rect">
             <a:avLst/>
@@ -8104,7 +8640,7 @@
               <a:buNone/>
             </a:pPr>
             <a:r>
-              <a:rPr lang="en-US" sz="2000" dirty="0">
+              <a:rPr lang="en-US" sz="1800" dirty="0">
                 <a:solidFill>
                   <a:srgbClr val="3C3828"/>
                 </a:solidFill>
@@ -8115,7 +8651,7 @@
               <a:t>Check it says </a:t>
             </a:r>
             <a:r>
-              <a:rPr lang="en-US" sz="2000" dirty="0">
+              <a:rPr lang="en-US" sz="1800" dirty="0">
                 <a:solidFill>
                   <a:srgbClr val="3C3828"/>
                 </a:solidFill>
@@ -8128,20 +8664,20 @@
               </a:rPr>
               <a:t>Pre-writing</a:t>
             </a:r>
-            <a:endParaRPr lang="en-US" sz="2000" dirty="0"/>
-          </a:p>
-        </p:txBody>
-      </p:sp>
-      <p:sp>
-        <p:nvSpPr>
-          <p:cNvPr id="10" name="Shape 7"/>
-          <p:cNvSpPr/>
-          <p:nvPr/>
-        </p:nvSpPr>
-        <p:spPr>
-          <a:xfrm>
-            <a:off x="8183880" y="3877056"/>
-            <a:ext cx="292608" cy="292608"/>
+            <a:endParaRPr lang="en-US" sz="1800" dirty="0"/>
+          </a:p>
+        </p:txBody>
+      </p:sp>
+      <p:sp>
+        <p:nvSpPr>
+          <p:cNvPr id="22" name="Shape 19"/>
+          <p:cNvSpPr/>
+          <p:nvPr/>
+        </p:nvSpPr>
+        <p:spPr>
+          <a:xfrm>
+            <a:off x="8579815" y="3589020"/>
+            <a:ext cx="457200" cy="457200"/>
           </a:xfrm>
           <a:prstGeom prst="ellipse">
             <a:avLst/>
@@ -8149,24 +8685,70 @@
           <a:solidFill>
             <a:srgbClr val="FF9755"/>
           </a:solidFill>
-          <a:ln w="12700">
-            <a:solidFill>
-              <a:srgbClr val="FF9755"/>
-            </a:solidFill>
-            <a:prstDash val="solid"/>
-          </a:ln>
-        </p:spPr>
-      </p:sp>
-      <p:sp>
-        <p:nvSpPr>
-          <p:cNvPr id="11" name="Text 8"/>
-          <p:cNvSpPr/>
-          <p:nvPr/>
-        </p:nvSpPr>
-        <p:spPr>
-          <a:xfrm>
-            <a:off x="8659368" y="3611880"/>
-            <a:ext cx="2846527" cy="822960"/>
+          <a:ln w="25400">
+            <a:solidFill>
+              <a:srgbClr val="FFFEFA"/>
+            </a:solidFill>
+            <a:prstDash val="solid"/>
+          </a:ln>
+          <a:effectLst>
+            <a:outerShdw sx="100000" sy="100000" kx="0" ky="0" algn="bl" rotWithShape="0" blurRad="50800" dist="19050" dir="5400000">
+              <a:srgbClr val="3C3828">
+                <a:alpha val="25000"/>
+              </a:srgbClr>
+            </a:outerShdw>
+          </a:effectLst>
+        </p:spPr>
+      </p:sp>
+      <p:sp>
+        <p:nvSpPr>
+          <p:cNvPr id="23" name="Text 20"/>
+          <p:cNvSpPr/>
+          <p:nvPr/>
+        </p:nvSpPr>
+        <p:spPr>
+          <a:xfrm>
+            <a:off x="8579815" y="3589020"/>
+            <a:ext cx="457200" cy="457200"/>
+          </a:xfrm>
+          <a:prstGeom prst="rect">
+            <a:avLst/>
+          </a:prstGeom>
+          <a:noFill/>
+          <a:ln/>
+        </p:spPr>
+        <p:txBody>
+          <a:bodyPr wrap="square" lIns="0" tIns="0" rIns="0" bIns="0" rtlCol="0" anchor="ctr"/>
+          <a:lstStyle/>
+          <a:p>
+            <a:pPr algn="ctr" indent="0" marL="0">
+              <a:buNone/>
+            </a:pPr>
+            <a:r>
+              <a:rPr lang="en-US" sz="1800" b="1" dirty="0">
+                <a:solidFill>
+                  <a:srgbClr val="FFFEFA"/>
+                </a:solidFill>
+                <a:latin typeface="Georgia" pitchFamily="34" charset="0"/>
+                <a:ea typeface="Georgia" pitchFamily="34" charset="-122"/>
+                <a:cs typeface="Georgia" pitchFamily="34" charset="-120"/>
+              </a:rPr>
+              <a:t>3</a:t>
+            </a:r>
+            <a:endParaRPr lang="en-US" sz="1800" dirty="0"/>
+          </a:p>
+        </p:txBody>
+      </p:sp>
+      <p:sp>
+        <p:nvSpPr>
+          <p:cNvPr id="24" name="Text 21"/>
+          <p:cNvSpPr/>
+          <p:nvPr/>
+        </p:nvSpPr>
+        <p:spPr>
+          <a:xfrm>
+            <a:off x="9219895" y="3401568"/>
+            <a:ext cx="2286000" cy="832104"/>
           </a:xfrm>
           <a:prstGeom prst="rect">
             <a:avLst/>
@@ -8182,7 +8764,7 @@
               <a:buNone/>
             </a:pPr>
             <a:r>
-              <a:rPr lang="en-US" sz="2000" dirty="0">
+              <a:rPr lang="en-US" sz="1800" dirty="0">
                 <a:solidFill>
                   <a:srgbClr val="3C3828"/>
                 </a:solidFill>
@@ -8192,20 +8774,20 @@
               </a:rPr>
               <a:t>Your prompt and writing are in the middle</a:t>
             </a:r>
-            <a:endParaRPr lang="en-US" sz="2000" dirty="0"/>
-          </a:p>
-        </p:txBody>
-      </p:sp>
-      <p:sp>
-        <p:nvSpPr>
-          <p:cNvPr id="12" name="Shape 9"/>
-          <p:cNvSpPr/>
-          <p:nvPr/>
-        </p:nvSpPr>
-        <p:spPr>
-          <a:xfrm>
-            <a:off x="8183880" y="4700016"/>
-            <a:ext cx="292608" cy="292608"/>
+            <a:endParaRPr lang="en-US" sz="1800" dirty="0"/>
+          </a:p>
+        </p:txBody>
+      </p:sp>
+      <p:sp>
+        <p:nvSpPr>
+          <p:cNvPr id="25" name="Shape 22"/>
+          <p:cNvSpPr/>
+          <p:nvPr/>
+        </p:nvSpPr>
+        <p:spPr>
+          <a:xfrm>
+            <a:off x="8579815" y="4421124"/>
+            <a:ext cx="457200" cy="457200"/>
           </a:xfrm>
           <a:prstGeom prst="ellipse">
             <a:avLst/>
@@ -8213,24 +8795,70 @@
           <a:solidFill>
             <a:srgbClr val="FC4067"/>
           </a:solidFill>
-          <a:ln w="12700">
-            <a:solidFill>
-              <a:srgbClr val="FC4067"/>
-            </a:solidFill>
-            <a:prstDash val="solid"/>
-          </a:ln>
-        </p:spPr>
-      </p:sp>
-      <p:sp>
-        <p:nvSpPr>
-          <p:cNvPr id="13" name="Text 10"/>
-          <p:cNvSpPr/>
-          <p:nvPr/>
-        </p:nvSpPr>
-        <p:spPr>
-          <a:xfrm>
-            <a:off x="8659368" y="4434840"/>
-            <a:ext cx="2846527" cy="822960"/>
+          <a:ln w="25400">
+            <a:solidFill>
+              <a:srgbClr val="FFFEFA"/>
+            </a:solidFill>
+            <a:prstDash val="solid"/>
+          </a:ln>
+          <a:effectLst>
+            <a:outerShdw sx="100000" sy="100000" kx="0" ky="0" algn="bl" rotWithShape="0" blurRad="50800" dist="19050" dir="5400000">
+              <a:srgbClr val="3C3828">
+                <a:alpha val="25000"/>
+              </a:srgbClr>
+            </a:outerShdw>
+          </a:effectLst>
+        </p:spPr>
+      </p:sp>
+      <p:sp>
+        <p:nvSpPr>
+          <p:cNvPr id="26" name="Text 23"/>
+          <p:cNvSpPr/>
+          <p:nvPr/>
+        </p:nvSpPr>
+        <p:spPr>
+          <a:xfrm>
+            <a:off x="8579815" y="4421124"/>
+            <a:ext cx="457200" cy="457200"/>
+          </a:xfrm>
+          <a:prstGeom prst="rect">
+            <a:avLst/>
+          </a:prstGeom>
+          <a:noFill/>
+          <a:ln/>
+        </p:spPr>
+        <p:txBody>
+          <a:bodyPr wrap="square" lIns="0" tIns="0" rIns="0" bIns="0" rtlCol="0" anchor="ctr"/>
+          <a:lstStyle/>
+          <a:p>
+            <a:pPr algn="ctr" indent="0" marL="0">
+              <a:buNone/>
+            </a:pPr>
+            <a:r>
+              <a:rPr lang="en-US" sz="1800" b="1" dirty="0">
+                <a:solidFill>
+                  <a:srgbClr val="FFFEFA"/>
+                </a:solidFill>
+                <a:latin typeface="Georgia" pitchFamily="34" charset="0"/>
+                <a:ea typeface="Georgia" pitchFamily="34" charset="-122"/>
+                <a:cs typeface="Georgia" pitchFamily="34" charset="-120"/>
+              </a:rPr>
+              <a:t>4</a:t>
+            </a:r>
+            <a:endParaRPr lang="en-US" sz="1800" dirty="0"/>
+          </a:p>
+        </p:txBody>
+      </p:sp>
+      <p:sp>
+        <p:nvSpPr>
+          <p:cNvPr id="27" name="Text 24"/>
+          <p:cNvSpPr/>
+          <p:nvPr/>
+        </p:nvSpPr>
+        <p:spPr>
+          <a:xfrm>
+            <a:off x="9219895" y="4233672"/>
+            <a:ext cx="2286000" cy="832104"/>
           </a:xfrm>
           <a:prstGeom prst="rect">
             <a:avLst/>
@@ -8246,7 +8874,7 @@
               <a:buNone/>
             </a:pPr>
             <a:r>
-              <a:rPr lang="en-US" sz="2000" dirty="0">
+              <a:rPr lang="en-US" sz="1800" dirty="0">
                 <a:solidFill>
                   <a:srgbClr val="3C3828"/>
                 </a:solidFill>
@@ -8256,20 +8884,20 @@
               </a:rPr>
               <a:t>My comments are on the right</a:t>
             </a:r>
-            <a:endParaRPr lang="en-US" sz="2000" dirty="0"/>
-          </a:p>
-        </p:txBody>
-      </p:sp>
-      <p:sp>
-        <p:nvSpPr>
-          <p:cNvPr id="14" name="Shape 11"/>
-          <p:cNvSpPr/>
-          <p:nvPr/>
-        </p:nvSpPr>
-        <p:spPr>
-          <a:xfrm>
-            <a:off x="8183880" y="5522976"/>
-            <a:ext cx="292608" cy="292608"/>
+            <a:endParaRPr lang="en-US" sz="1800" dirty="0"/>
+          </a:p>
+        </p:txBody>
+      </p:sp>
+      <p:sp>
+        <p:nvSpPr>
+          <p:cNvPr id="28" name="Shape 25"/>
+          <p:cNvSpPr/>
+          <p:nvPr/>
+        </p:nvSpPr>
+        <p:spPr>
+          <a:xfrm>
+            <a:off x="8579815" y="5253228"/>
+            <a:ext cx="457200" cy="457200"/>
           </a:xfrm>
           <a:prstGeom prst="ellipse">
             <a:avLst/>
@@ -8277,24 +8905,70 @@
           <a:solidFill>
             <a:srgbClr val="02BDC7"/>
           </a:solidFill>
-          <a:ln w="12700">
-            <a:solidFill>
-              <a:srgbClr val="02BDC7"/>
-            </a:solidFill>
-            <a:prstDash val="solid"/>
-          </a:ln>
-        </p:spPr>
-      </p:sp>
-      <p:sp>
-        <p:nvSpPr>
-          <p:cNvPr id="15" name="Text 12"/>
-          <p:cNvSpPr/>
-          <p:nvPr/>
-        </p:nvSpPr>
-        <p:spPr>
-          <a:xfrm>
-            <a:off x="8659368" y="5257800"/>
-            <a:ext cx="2846527" cy="822960"/>
+          <a:ln w="25400">
+            <a:solidFill>
+              <a:srgbClr val="FFFEFA"/>
+            </a:solidFill>
+            <a:prstDash val="solid"/>
+          </a:ln>
+          <a:effectLst>
+            <a:outerShdw sx="100000" sy="100000" kx="0" ky="0" algn="bl" rotWithShape="0" blurRad="50800" dist="19050" dir="5400000">
+              <a:srgbClr val="3C3828">
+                <a:alpha val="25000"/>
+              </a:srgbClr>
+            </a:outerShdw>
+          </a:effectLst>
+        </p:spPr>
+      </p:sp>
+      <p:sp>
+        <p:nvSpPr>
+          <p:cNvPr id="29" name="Text 26"/>
+          <p:cNvSpPr/>
+          <p:nvPr/>
+        </p:nvSpPr>
+        <p:spPr>
+          <a:xfrm>
+            <a:off x="8579815" y="5253228"/>
+            <a:ext cx="457200" cy="457200"/>
+          </a:xfrm>
+          <a:prstGeom prst="rect">
+            <a:avLst/>
+          </a:prstGeom>
+          <a:noFill/>
+          <a:ln/>
+        </p:spPr>
+        <p:txBody>
+          <a:bodyPr wrap="square" lIns="0" tIns="0" rIns="0" bIns="0" rtlCol="0" anchor="ctr"/>
+          <a:lstStyle/>
+          <a:p>
+            <a:pPr algn="ctr" indent="0" marL="0">
+              <a:buNone/>
+            </a:pPr>
+            <a:r>
+              <a:rPr lang="en-US" sz="1800" b="1" dirty="0">
+                <a:solidFill>
+                  <a:srgbClr val="FFFEFA"/>
+                </a:solidFill>
+                <a:latin typeface="Georgia" pitchFamily="34" charset="0"/>
+                <a:ea typeface="Georgia" pitchFamily="34" charset="-122"/>
+                <a:cs typeface="Georgia" pitchFamily="34" charset="-120"/>
+              </a:rPr>
+              <a:t>5</a:t>
+            </a:r>
+            <a:endParaRPr lang="en-US" sz="1800" dirty="0"/>
+          </a:p>
+        </p:txBody>
+      </p:sp>
+      <p:sp>
+        <p:nvSpPr>
+          <p:cNvPr id="30" name="Text 27"/>
+          <p:cNvSpPr/>
+          <p:nvPr/>
+        </p:nvSpPr>
+        <p:spPr>
+          <a:xfrm>
+            <a:off x="9219895" y="5065776"/>
+            <a:ext cx="2286000" cy="832104"/>
           </a:xfrm>
           <a:prstGeom prst="rect">
             <a:avLst/>
@@ -8310,7 +8984,7 @@
               <a:buNone/>
             </a:pPr>
             <a:r>
-              <a:rPr lang="en-US" sz="2000" dirty="0">
+              <a:rPr lang="en-US" sz="1800" dirty="0">
                 <a:solidFill>
                   <a:srgbClr val="3C3828"/>
                 </a:solidFill>
@@ -8321,7 +8995,7 @@
               <a:t>Written a bunch? Click </a:t>
             </a:r>
             <a:r>
-              <a:rPr lang="en-US" sz="2000" dirty="0">
+              <a:rPr lang="en-US" sz="1800" dirty="0">
                 <a:solidFill>
                   <a:srgbClr val="3C3828"/>
                 </a:solidFill>
@@ -8334,7 +9008,7 @@
               </a:rPr>
               <a:t>Give me feedback!</a:t>
             </a:r>
-            <a:endParaRPr lang="en-US" sz="2000" dirty="0"/>
+            <a:endParaRPr lang="en-US" sz="1800" dirty="0"/>
           </a:p>
         </p:txBody>
       </p:sp>
@@ -8508,7 +9182,7 @@
                 <a:ea typeface="Georgia" pitchFamily="34" charset="-122"/>
                 <a:cs typeface="Georgia" pitchFamily="34" charset="-120"/>
               </a:rPr>
-              <a:t> topic</a:t>
+              <a:t> topic</a:t>
             </a:r>
             <a:endParaRPr lang="en-US" sz="3600" dirty="0"/>
           </a:p>
@@ -8674,7 +9348,7 @@
                 <a:ea typeface="Georgia" pitchFamily="34" charset="-122"/>
                 <a:cs typeface="Georgia" pitchFamily="34" charset="-120"/>
               </a:rPr>
-              <a:t> problem in your community that you’ll talk about in your essay.</a:t>
+              <a:t> problem in your community that you’ll talk about in your essay.</a:t>
             </a:r>
             <a:endParaRPr lang="en-US" sz="4000" dirty="0"/>
           </a:p>
@@ -8825,7 +9499,7 @@
                 <a:ea typeface="Georgia" pitchFamily="34" charset="-122"/>
                 <a:cs typeface="Georgia" pitchFamily="34" charset="-120"/>
               </a:rPr>
-              <a:t>Pre-writing: do and don’t</a:t>
+              <a:t>Pre-writing: do and don’t</a:t>
             </a:r>
             <a:endParaRPr lang="en-US" sz="3600" dirty="0"/>
           </a:p>
@@ -9350,7 +10024,7 @@
               <a:buNone/>
             </a:pPr>
             <a:r>
-              <a:rPr lang="en-US" sz="1700" b="1" dirty="0">
+              <a:rPr lang="en-US" sz="1800" b="1" dirty="0">
                 <a:solidFill>
                   <a:srgbClr val="3C3828"/>
                 </a:solidFill>
@@ -9360,7 +10034,7 @@
               </a:rPr>
               <a:t>Pro-tip: Stay off the internet!</a:t>
             </a:r>
-            <a:endParaRPr lang="en-US" sz="1700" dirty="0"/>
+            <a:endParaRPr lang="en-US" sz="1800" dirty="0"/>
           </a:p>
         </p:txBody>
       </p:sp>
@@ -9509,7 +10183,7 @@
                 <a:ea typeface="Georgia" pitchFamily="34" charset="-122"/>
                 <a:cs typeface="Georgia" pitchFamily="34" charset="-120"/>
               </a:rPr>
-              <a:t>What are we doing here?</a:t>
+              <a:t>What are we doing here?</a:t>
             </a:r>
             <a:endParaRPr lang="en-US" sz="3600" dirty="0"/>
           </a:p>
@@ -9686,12 +10360,12 @@
         </p:nvSpPr>
         <p:spPr>
           <a:xfrm>
-            <a:off x="685800" y="2971800"/>
-            <a:ext cx="3393338" cy="3108960"/>
+            <a:off x="685800" y="2984754"/>
+            <a:ext cx="3393338" cy="3083052"/>
           </a:xfrm>
           <a:prstGeom prst="roundRect">
             <a:avLst>
-              <a:gd name="adj" fmla="val 4118"/>
+              <a:gd name="adj" fmla="val 4152"/>
             </a:avLst>
           </a:prstGeom>
           <a:solidFill>
@@ -9720,7 +10394,7 @@
         </p:nvSpPr>
         <p:spPr>
           <a:xfrm>
-            <a:off x="813816" y="2971800"/>
+            <a:off x="813816" y="2984754"/>
             <a:ext cx="3137306" cy="91440"/>
           </a:xfrm>
           <a:prstGeom prst="rect">
@@ -9745,7 +10419,7 @@
         </p:nvSpPr>
         <p:spPr>
           <a:xfrm>
-            <a:off x="1005840" y="3337560"/>
+            <a:off x="1005840" y="3350514"/>
             <a:ext cx="731520" cy="731520"/>
           </a:xfrm>
           <a:prstGeom prst="ellipse">
@@ -9770,7 +10444,7 @@
         </p:nvSpPr>
         <p:spPr>
           <a:xfrm>
-            <a:off x="1005840" y="3337560"/>
+            <a:off x="1005840" y="3350514"/>
             <a:ext cx="731520" cy="731520"/>
           </a:xfrm>
           <a:prstGeom prst="rect">
@@ -9809,8 +10483,8 @@
         </p:nvSpPr>
         <p:spPr>
           <a:xfrm>
-            <a:off x="1005840" y="4251960"/>
-            <a:ext cx="2753258" cy="1645920"/>
+            <a:off x="1005840" y="4264914"/>
+            <a:ext cx="2753258" cy="1620012"/>
           </a:xfrm>
           <a:prstGeom prst="rect">
             <a:avLst/>
@@ -9848,12 +10522,12 @@
         </p:nvSpPr>
         <p:spPr>
           <a:xfrm>
-            <a:off x="4399178" y="2971800"/>
-            <a:ext cx="3393338" cy="3108960"/>
+            <a:off x="4399178" y="2984754"/>
+            <a:ext cx="3393338" cy="3083052"/>
           </a:xfrm>
           <a:prstGeom prst="roundRect">
             <a:avLst>
-              <a:gd name="adj" fmla="val 4118"/>
+              <a:gd name="adj" fmla="val 4152"/>
             </a:avLst>
           </a:prstGeom>
           <a:solidFill>
@@ -9882,7 +10556,7 @@
         </p:nvSpPr>
         <p:spPr>
           <a:xfrm>
-            <a:off x="4527194" y="2971800"/>
+            <a:off x="4527194" y="2984754"/>
             <a:ext cx="3137306" cy="91440"/>
           </a:xfrm>
           <a:prstGeom prst="rect">
@@ -9907,7 +10581,7 @@
         </p:nvSpPr>
         <p:spPr>
           <a:xfrm>
-            <a:off x="4719218" y="3337560"/>
+            <a:off x="4719218" y="3350514"/>
             <a:ext cx="731520" cy="731520"/>
           </a:xfrm>
           <a:prstGeom prst="ellipse">
@@ -9932,7 +10606,7 @@
         </p:nvSpPr>
         <p:spPr>
           <a:xfrm>
-            <a:off x="4719218" y="3337560"/>
+            <a:off x="4719218" y="3350514"/>
             <a:ext cx="731520" cy="731520"/>
           </a:xfrm>
           <a:prstGeom prst="rect">
@@ -9971,8 +10645,8 @@
         </p:nvSpPr>
         <p:spPr>
           <a:xfrm>
-            <a:off x="4719218" y="4251960"/>
-            <a:ext cx="2753258" cy="1645920"/>
+            <a:off x="4719218" y="4264914"/>
+            <a:ext cx="2753258" cy="1620012"/>
           </a:xfrm>
           <a:prstGeom prst="rect">
             <a:avLst/>
@@ -10010,12 +10684,12 @@
         </p:nvSpPr>
         <p:spPr>
           <a:xfrm>
-            <a:off x="8112557" y="2971800"/>
-            <a:ext cx="3393338" cy="3108960"/>
+            <a:off x="8112557" y="2984754"/>
+            <a:ext cx="3393338" cy="3083052"/>
           </a:xfrm>
           <a:prstGeom prst="roundRect">
             <a:avLst>
-              <a:gd name="adj" fmla="val 4118"/>
+              <a:gd name="adj" fmla="val 4152"/>
             </a:avLst>
           </a:prstGeom>
           <a:solidFill>
@@ -10044,7 +10718,7 @@
         </p:nvSpPr>
         <p:spPr>
           <a:xfrm>
-            <a:off x="8240573" y="2971800"/>
+            <a:off x="8240573" y="2984754"/>
             <a:ext cx="3137306" cy="91440"/>
           </a:xfrm>
           <a:prstGeom prst="rect">
@@ -10069,7 +10743,7 @@
         </p:nvSpPr>
         <p:spPr>
           <a:xfrm>
-            <a:off x="8432597" y="3337560"/>
+            <a:off x="8432597" y="3350514"/>
             <a:ext cx="731520" cy="731520"/>
           </a:xfrm>
           <a:prstGeom prst="ellipse">
@@ -10094,7 +10768,7 @@
         </p:nvSpPr>
         <p:spPr>
           <a:xfrm>
-            <a:off x="8432597" y="3337560"/>
+            <a:off x="8432597" y="3350514"/>
             <a:ext cx="731520" cy="731520"/>
           </a:xfrm>
           <a:prstGeom prst="rect">
@@ -10133,8 +10807,8 @@
         </p:nvSpPr>
         <p:spPr>
           <a:xfrm>
-            <a:off x="8432597" y="4251960"/>
-            <a:ext cx="2753258" cy="1645920"/>
+            <a:off x="8432597" y="4264914"/>
+            <a:ext cx="2753258" cy="1620012"/>
           </a:xfrm>
           <a:prstGeom prst="rect">
             <a:avLst/>
@@ -10894,7 +11568,7 @@
               <a:buNone/>
             </a:pPr>
             <a:r>
-              <a:rPr lang="en-US" sz="2600" dirty="0">
+              <a:rPr lang="en-US" sz="3200" dirty="0">
                 <a:solidFill>
                   <a:srgbClr val="3C3828"/>
                 </a:solidFill>
@@ -10905,7 +11579,7 @@
               <a:t>A lot of your pre-write will be rambling and might feel kind of random. But there will be parts that stand out: interesting, sharp, worthy of more discussion. </a:t>
             </a:r>
             <a:r>
-              <a:rPr lang="en-US" sz="2600" dirty="0">
+              <a:rPr lang="en-US" sz="3200" dirty="0">
                 <a:solidFill>
                   <a:srgbClr val="3C3828"/>
                 </a:solidFill>
@@ -10919,7 +11593,7 @@
               <a:t>These are “the diamonds,”</a:t>
             </a:r>
             <a:r>
-              <a:rPr lang="en-US" sz="2600" dirty="0">
+              <a:rPr lang="en-US" sz="3200" dirty="0">
                 <a:solidFill>
                   <a:srgbClr val="3C3828"/>
                 </a:solidFill>
@@ -10927,9 +11601,9 @@
                 <a:ea typeface="Georgia" pitchFamily="34" charset="-122"/>
                 <a:cs typeface="Georgia" pitchFamily="34" charset="-120"/>
               </a:rPr>
-              <a:t> and they could be a specific focus for your essay.</a:t>
-            </a:r>
-            <a:endParaRPr lang="en-US" sz="2600" dirty="0"/>
+              <a:t> and they could be a specific focus for your essay.</a:t>
+            </a:r>
+            <a:endParaRPr lang="en-US" sz="3200" dirty="0"/>
           </a:p>
         </p:txBody>
       </p:sp>
@@ -11078,7 +11752,7 @@
                 <a:ea typeface="Georgia" pitchFamily="34" charset="-122"/>
                 <a:cs typeface="Georgia" pitchFamily="34" charset="-120"/>
               </a:rPr>
-              <a:t>What have we learned today?</a:t>
+              <a:t>What have we learned today?</a:t>
             </a:r>
             <a:endParaRPr lang="en-US" sz="3600" dirty="0"/>
           </a:p>
@@ -11950,7 +12624,7 @@
                 <a:ea typeface="Georgia" pitchFamily="34" charset="-122"/>
                 <a:cs typeface="Georgia" pitchFamily="34" charset="-120"/>
               </a:rPr>
-              <a:t>Generating ideas requires energy. Don’t expect it to be easy.</a:t>
+              <a:t>Generating ideas requires energy. Don’t expect it to be easy.</a:t>
             </a:r>
             <a:endParaRPr lang="en-US" sz="3000" dirty="0"/>
           </a:p>
@@ -12352,7 +13026,7 @@
                 <a:ea typeface="Calibri" pitchFamily="34" charset="-122"/>
                 <a:cs typeface="Calibri" pitchFamily="34" charset="-120"/>
               </a:rPr>
-              <a:t>See you next time: thesis statements.</a:t>
+              <a:t>Ask why. Then ask again.</a:t>
             </a:r>
             <a:endParaRPr lang="en-US" sz="2000" dirty="0"/>
           </a:p>
@@ -12401,6 +13075,507 @@
             <a:fld id="{F7021451-1387-4CA6-816F-3879F97B5CBC}" type="slidenum">
               <a:rPr b="0" lang="en-US"/>
               <a:t>23</a:t>
+            </a:fld>
+            <a:endParaRPr lang="en-US"/>
+          </a:p>
+        </p:txBody>
+      </p:sp>
+    </p:spTree>
+  </p:cSld>
+  <p:clrMapOvr>
+    <a:masterClrMapping/>
+  </p:clrMapOvr>
+</p:sld>
+</file>
+
+<file path=ppt/slides/slide24.xml><?xml version="1.0" encoding="utf-8"?>
+<p:sld xmlns:a="http://schemas.openxmlformats.org/drawingml/2006/main" xmlns:r="http://schemas.openxmlformats.org/officeDocument/2006/relationships" xmlns:p="http://schemas.openxmlformats.org/presentationml/2006/main">
+  <p:cSld name="Slide 24">
+    <p:bg>
+      <p:bgPr>
+        <a:solidFill>
+          <a:srgbClr val="02BDC7"/>
+        </a:solidFill>
+      </p:bgPr>
+    </p:bg>
+    <p:spTree>
+      <p:nvGrpSpPr>
+        <p:cNvPr id="1" name=""/>
+        <p:cNvGrpSpPr/>
+        <p:nvPr/>
+      </p:nvGrpSpPr>
+      <p:grpSpPr>
+        <a:xfrm>
+          <a:off x="0" y="0"/>
+          <a:ext cx="0" cy="0"/>
+          <a:chOff x="0" y="0"/>
+          <a:chExt cx="0" cy="0"/>
+        </a:xfrm>
+      </p:grpSpPr>
+      <p:sp>
+        <p:nvSpPr>
+          <p:cNvPr id="2" name="Shape 0"/>
+          <p:cNvSpPr/>
+          <p:nvPr/>
+        </p:nvSpPr>
+        <p:spPr>
+          <a:xfrm>
+            <a:off x="4175608" y="1234440"/>
+            <a:ext cx="3840480" cy="3840480"/>
+          </a:xfrm>
+          <a:prstGeom prst="ellipse">
+            <a:avLst/>
+          </a:prstGeom>
+          <a:solidFill>
+            <a:srgbClr val="FFFEFA"/>
+          </a:solidFill>
+          <a:ln w="12700">
+            <a:solidFill>
+              <a:srgbClr val="FFFEFA"/>
+            </a:solidFill>
+            <a:prstDash val="solid"/>
+          </a:ln>
+          <a:effectLst>
+            <a:outerShdw sx="100000" sy="100000" kx="0" ky="0" algn="bl" rotWithShape="0" blurRad="177800" dist="50800" dir="5400000">
+              <a:srgbClr val="3C3828">
+                <a:alpha val="18000"/>
+              </a:srgbClr>
+            </a:outerShdw>
+          </a:effectLst>
+        </p:spPr>
+      </p:sp>
+      <p:sp>
+        <p:nvSpPr>
+          <p:cNvPr id="3" name="Text 1"/>
+          <p:cNvSpPr/>
+          <p:nvPr/>
+        </p:nvSpPr>
+        <p:spPr>
+          <a:xfrm>
+            <a:off x="4175608" y="2377440"/>
+            <a:ext cx="3840480" cy="1097280"/>
+          </a:xfrm>
+          <a:prstGeom prst="rect">
+            <a:avLst/>
+          </a:prstGeom>
+          <a:noFill/>
+          <a:ln/>
+        </p:spPr>
+        <p:txBody>
+          <a:bodyPr wrap="square" lIns="0" tIns="0" rIns="0" bIns="0" rtlCol="0" anchor="ctr"/>
+          <a:lstStyle/>
+          <a:p>
+            <a:pPr algn="ctr" indent="0" marL="0">
+              <a:buNone/>
+            </a:pPr>
+            <a:r>
+              <a:rPr lang="en-US" sz="7200" b="1" dirty="0">
+                <a:solidFill>
+                  <a:srgbClr val="3C3828"/>
+                </a:solidFill>
+                <a:latin typeface="Georgia" pitchFamily="34" charset="0"/>
+                <a:ea typeface="Georgia" pitchFamily="34" charset="-122"/>
+                <a:cs typeface="Georgia" pitchFamily="34" charset="-120"/>
+              </a:rPr>
+              <a:t>YAWP!</a:t>
+            </a:r>
+            <a:endParaRPr lang="en-US" sz="7200" dirty="0"/>
+          </a:p>
+        </p:txBody>
+      </p:sp>
+      <p:sp>
+        <p:nvSpPr>
+          <p:cNvPr id="4" name="Text 2"/>
+          <p:cNvSpPr/>
+          <p:nvPr/>
+        </p:nvSpPr>
+        <p:spPr>
+          <a:xfrm>
+            <a:off x="4175608" y="3520440"/>
+            <a:ext cx="3840480" cy="365760"/>
+          </a:xfrm>
+          <a:prstGeom prst="rect">
+            <a:avLst/>
+          </a:prstGeom>
+          <a:noFill/>
+          <a:ln/>
+        </p:spPr>
+        <p:txBody>
+          <a:bodyPr wrap="square" lIns="0" tIns="0" rIns="0" bIns="0" rtlCol="0" anchor="ctr"/>
+          <a:lstStyle/>
+          <a:p>
+            <a:pPr algn="ctr" indent="0" marL="0">
+              <a:buNone/>
+            </a:pPr>
+            <a:r>
+              <a:rPr lang="en-US" sz="1300" b="1" spc="300" kern="0" dirty="0">
+                <a:solidFill>
+                  <a:srgbClr val="D27151"/>
+                </a:solidFill>
+                <a:latin typeface="Consolas" pitchFamily="34" charset="0"/>
+                <a:ea typeface="Consolas" pitchFamily="34" charset="-122"/>
+                <a:cs typeface="Consolas" pitchFamily="34" charset="-120"/>
+              </a:rPr>
+              <a:t>WRITING PROGRAM</a:t>
+            </a:r>
+            <a:endParaRPr lang="en-US" sz="1300" dirty="0"/>
+          </a:p>
+        </p:txBody>
+      </p:sp>
+      <p:sp>
+        <p:nvSpPr>
+          <p:cNvPr id="5" name="Shape 3"/>
+          <p:cNvSpPr/>
+          <p:nvPr/>
+        </p:nvSpPr>
+        <p:spPr>
+          <a:xfrm>
+            <a:off x="6918808" y="777240"/>
+            <a:ext cx="1463040" cy="1463040"/>
+          </a:xfrm>
+          <a:prstGeom prst="ellipse">
+            <a:avLst/>
+          </a:prstGeom>
+          <a:solidFill>
+            <a:srgbClr val="FFB600"/>
+          </a:solidFill>
+          <a:ln w="12700">
+            <a:solidFill>
+              <a:srgbClr val="FFB600"/>
+            </a:solidFill>
+            <a:prstDash val="solid"/>
+          </a:ln>
+        </p:spPr>
+      </p:sp>
+      <p:pic>
+        <p:nvPicPr>
+          <p:cNvPr id="6" name="Image 0" descr="lightbulb icon">    </p:cNvPr>
+          <p:cNvPicPr>
+            <a:picLocks noChangeAspect="1"/>
+          </p:cNvPicPr>
+          <p:nvPr/>
+        </p:nvPicPr>
+        <p:blipFill>
+          <a:blip r:embed="rId1"/>
+          <a:stretch>
+            <a:fillRect/>
+          </a:stretch>
+        </p:blipFill>
+        <p:spPr>
+          <a:xfrm>
+            <a:off x="7211416" y="1069848"/>
+            <a:ext cx="877824" cy="877824"/>
+          </a:xfrm>
+          <a:prstGeom prst="rect">
+            <a:avLst/>
+          </a:prstGeom>
+        </p:spPr>
+      </p:pic>
+      <p:sp>
+        <p:nvSpPr>
+          <p:cNvPr id="7" name="Shape 4"/>
+          <p:cNvSpPr/>
+          <p:nvPr/>
+        </p:nvSpPr>
+        <p:spPr>
+          <a:xfrm>
+            <a:off x="3626968" y="1508760"/>
+            <a:ext cx="1005840" cy="1005840"/>
+          </a:xfrm>
+          <a:prstGeom prst="ellipse">
+            <a:avLst/>
+          </a:prstGeom>
+          <a:solidFill>
+            <a:srgbClr val="FF9755"/>
+          </a:solidFill>
+          <a:ln w="12700">
+            <a:solidFill>
+              <a:srgbClr val="FF9755"/>
+            </a:solidFill>
+            <a:prstDash val="solid"/>
+          </a:ln>
+        </p:spPr>
+      </p:sp>
+      <p:pic>
+        <p:nvPicPr>
+          <p:cNvPr id="8" name="Image 1" descr="puzzle icon">    </p:cNvPr>
+          <p:cNvPicPr>
+            <a:picLocks noChangeAspect="1"/>
+          </p:cNvPicPr>
+          <p:nvPr/>
+        </p:nvPicPr>
+        <p:blipFill>
+          <a:blip r:embed="rId2"/>
+          <a:stretch>
+            <a:fillRect/>
+          </a:stretch>
+        </p:blipFill>
+        <p:spPr>
+          <a:xfrm>
+            <a:off x="3828136" y="1709928"/>
+            <a:ext cx="603504" cy="603504"/>
+          </a:xfrm>
+          <a:prstGeom prst="rect">
+            <a:avLst/>
+          </a:prstGeom>
+        </p:spPr>
+      </p:pic>
+      <p:sp>
+        <p:nvSpPr>
+          <p:cNvPr id="9" name="Shape 5"/>
+          <p:cNvSpPr/>
+          <p:nvPr/>
+        </p:nvSpPr>
+        <p:spPr>
+          <a:xfrm>
+            <a:off x="4267048" y="4069080"/>
+            <a:ext cx="1188720" cy="1188720"/>
+          </a:xfrm>
+          <a:prstGeom prst="ellipse">
+            <a:avLst/>
+          </a:prstGeom>
+          <a:solidFill>
+            <a:srgbClr val="FC4540"/>
+          </a:solidFill>
+          <a:ln w="12700">
+            <a:solidFill>
+              <a:srgbClr val="FC4540"/>
+            </a:solidFill>
+            <a:prstDash val="solid"/>
+          </a:ln>
+        </p:spPr>
+      </p:sp>
+      <p:pic>
+        <p:nvPicPr>
+          <p:cNvPr id="10" name="Image 2" descr="thumbs icon">    </p:cNvPr>
+          <p:cNvPicPr>
+            <a:picLocks noChangeAspect="1"/>
+          </p:cNvPicPr>
+          <p:nvPr/>
+        </p:nvPicPr>
+        <p:blipFill>
+          <a:blip r:embed="rId3"/>
+          <a:stretch>
+            <a:fillRect/>
+          </a:stretch>
+        </p:blipFill>
+        <p:spPr>
+          <a:xfrm>
+            <a:off x="4504792" y="4306824"/>
+            <a:ext cx="713232" cy="713232"/>
+          </a:xfrm>
+          <a:prstGeom prst="rect">
+            <a:avLst/>
+          </a:prstGeom>
+        </p:spPr>
+      </p:pic>
+      <p:sp>
+        <p:nvSpPr>
+          <p:cNvPr id="11" name="Shape 6"/>
+          <p:cNvSpPr/>
+          <p:nvPr/>
+        </p:nvSpPr>
+        <p:spPr>
+          <a:xfrm>
+            <a:off x="3855568" y="2971800"/>
+            <a:ext cx="274320" cy="274320"/>
+          </a:xfrm>
+          <a:prstGeom prst="ellipse">
+            <a:avLst/>
+          </a:prstGeom>
+          <a:solidFill>
+            <a:srgbClr val="FFFEFA"/>
+          </a:solidFill>
+          <a:ln w="12700">
+            <a:solidFill>
+              <a:srgbClr val="FFFEFA"/>
+            </a:solidFill>
+            <a:prstDash val="solid"/>
+          </a:ln>
+        </p:spPr>
+      </p:sp>
+      <p:sp>
+        <p:nvSpPr>
+          <p:cNvPr id="12" name="Shape 7"/>
+          <p:cNvSpPr/>
+          <p:nvPr/>
+        </p:nvSpPr>
+        <p:spPr>
+          <a:xfrm>
+            <a:off x="8107528" y="2606040"/>
+            <a:ext cx="411480" cy="411480"/>
+          </a:xfrm>
+          <a:prstGeom prst="ellipse">
+            <a:avLst/>
+          </a:prstGeom>
+          <a:solidFill>
+            <a:srgbClr val="FC4067"/>
+          </a:solidFill>
+          <a:ln w="12700">
+            <a:solidFill>
+              <a:srgbClr val="FC4067"/>
+            </a:solidFill>
+            <a:prstDash val="solid"/>
+          </a:ln>
+        </p:spPr>
+      </p:sp>
+      <p:sp>
+        <p:nvSpPr>
+          <p:cNvPr id="13" name="Shape 8"/>
+          <p:cNvSpPr/>
+          <p:nvPr/>
+        </p:nvSpPr>
+        <p:spPr>
+          <a:xfrm>
+            <a:off x="7558888" y="5120640"/>
+            <a:ext cx="548640" cy="548640"/>
+          </a:xfrm>
+          <a:prstGeom prst="ellipse">
+            <a:avLst/>
+          </a:prstGeom>
+          <a:solidFill>
+            <a:srgbClr val="FF9755"/>
+          </a:solidFill>
+          <a:ln w="12700">
+            <a:solidFill>
+              <a:srgbClr val="FF9755"/>
+            </a:solidFill>
+            <a:prstDash val="solid"/>
+          </a:ln>
+        </p:spPr>
+      </p:sp>
+      <p:sp>
+        <p:nvSpPr>
+          <p:cNvPr id="14" name="Shape 9"/>
+          <p:cNvSpPr/>
+          <p:nvPr/>
+        </p:nvSpPr>
+        <p:spPr>
+          <a:xfrm>
+            <a:off x="6735928" y="5349240"/>
+            <a:ext cx="164592" cy="164592"/>
+          </a:xfrm>
+          <a:prstGeom prst="ellipse">
+            <a:avLst/>
+          </a:prstGeom>
+          <a:solidFill>
+            <a:srgbClr val="FFB600"/>
+          </a:solidFill>
+          <a:ln w="12700">
+            <a:solidFill>
+              <a:srgbClr val="FFB600"/>
+            </a:solidFill>
+            <a:prstDash val="solid"/>
+          </a:ln>
+        </p:spPr>
+      </p:sp>
+      <p:sp>
+        <p:nvSpPr>
+          <p:cNvPr id="15" name="Shape 10"/>
+          <p:cNvSpPr/>
+          <p:nvPr/>
+        </p:nvSpPr>
+        <p:spPr>
+          <a:xfrm>
+            <a:off x="5455768" y="5257800"/>
+            <a:ext cx="201168" cy="201168"/>
+          </a:xfrm>
+          <a:prstGeom prst="ellipse">
+            <a:avLst/>
+          </a:prstGeom>
+          <a:solidFill>
+            <a:srgbClr val="FFFEFA"/>
+          </a:solidFill>
+          <a:ln w="12700">
+            <a:solidFill>
+              <a:srgbClr val="FFFEFA"/>
+            </a:solidFill>
+            <a:prstDash val="solid"/>
+          </a:ln>
+        </p:spPr>
+      </p:sp>
+      <p:sp>
+        <p:nvSpPr>
+          <p:cNvPr id="16" name="Text 11"/>
+          <p:cNvSpPr/>
+          <p:nvPr/>
+        </p:nvSpPr>
+        <p:spPr>
+          <a:xfrm>
+            <a:off x="685800" y="5577840"/>
+            <a:ext cx="10820095" cy="548640"/>
+          </a:xfrm>
+          <a:prstGeom prst="rect">
+            <a:avLst/>
+          </a:prstGeom>
+          <a:noFill/>
+          <a:ln/>
+        </p:spPr>
+        <p:txBody>
+          <a:bodyPr wrap="square" lIns="0" tIns="0" rIns="0" bIns="0" rtlCol="0" anchor="ctr"/>
+          <a:lstStyle/>
+          <a:p>
+            <a:pPr algn="ctr" indent="0" marL="0">
+              <a:buNone/>
+            </a:pPr>
+            <a:r>
+              <a:rPr lang="en-US" sz="2200" dirty="0">
+                <a:solidFill>
+                  <a:srgbClr val="FFFEFA"/>
+                </a:solidFill>
+                <a:latin typeface="Calibri" pitchFamily="34" charset="0"/>
+                <a:ea typeface="Calibri" pitchFamily="34" charset="-122"/>
+                <a:cs typeface="Calibri" pitchFamily="34" charset="-120"/>
+              </a:rPr>
+              <a:t>Next time: thesis statements.</a:t>
+            </a:r>
+            <a:endParaRPr lang="en-US" sz="2200" dirty="0"/>
+          </a:p>
+        </p:txBody>
+      </p:sp>
+      <p:sp>
+        <p:nvSpPr>
+          <p:cNvPr id="25" name="Slide Number Placeholder 0"/>
+          <p:cNvSpPr>
+            <a:spLocks noGrp="1"/>
+          </p:cNvSpPr>
+          <p:nvPr>
+            <p:ph type="sldNum" sz="quarter" idx="4294967295"/>
+          </p:nvPr>
+        </p:nvSpPr>
+        <p:spPr>
+          <a:xfrm>
+            <a:off x="10957255" y="6355080"/>
+            <a:ext cx="548640" cy="320040"/>
+          </a:xfrm>
+          <a:prstGeom prst="rect">
+            <a:avLst/>
+          </a:prstGeom>
+          <a:extLst>
+            <a:ext uri="{C572A759-6A51-4108-AA02-DFA0A04FC94B}">
+              <ma14:wrappingTextBoxFlag xmlns:ma14="http://schemas.microsoft.com/office/mac/drawingml/2011/main" val="0"/>
+            </a:ext>
+          </a:extLst>
+        </p:spPr>
+        <p:txBody>
+          <a:bodyPr/>
+          <a:lstStyle>
+            <a:lvl1pPr>
+              <a:defRPr sz="1000">
+                <a:solidFill>
+                  <a:srgbClr val="7E7C78"/>
+                </a:solidFill>
+                <a:latin typeface="Consolas"/>
+                <a:ea typeface="Consolas"/>
+                <a:cs typeface="Consolas"/>
+              </a:defRPr>
+            </a:lvl1pPr>
+          </a:lstStyle>
+          <a:p>
+            <a:pPr algn="r"/>
+            <a:fld id="{F7021451-1387-4CA6-816F-3879F97B5CBC}" type="slidenum">
+              <a:rPr b="0" lang="en-US"/>
+              <a:t>24</a:t>
             </a:fld>
             <a:endParaRPr lang="en-US"/>
           </a:p>
@@ -12503,7 +13678,7 @@
                 <a:ea typeface="Georgia" pitchFamily="34" charset="-122"/>
                 <a:cs typeface="Georgia" pitchFamily="34" charset="-120"/>
               </a:rPr>
-              <a:t>Look at this picture.</a:t>
+              <a:t>Look at this picture.</a:t>
             </a:r>
             <a:endParaRPr lang="en-US" sz="3600" dirty="0"/>
           </a:p>
@@ -12876,7 +14051,7 @@
                 <a:ea typeface="Georgia" pitchFamily="34" charset="-122"/>
                 <a:cs typeface="Georgia" pitchFamily="34" charset="-120"/>
               </a:rPr>
-              <a:t>What has happened here?</a:t>
+              <a:t>What has happened here?</a:t>
             </a:r>
             <a:endParaRPr lang="en-US" sz="3600" dirty="0"/>
           </a:p>
@@ -13440,7 +14615,7 @@
                 <a:ea typeface="Georgia" pitchFamily="34" charset="-122"/>
                 <a:cs typeface="Georgia" pitchFamily="34" charset="-120"/>
               </a:rPr>
-              <a:t>Fallen Man, Paris, France, 1967</a:t>
+              <a:t>Fallen Man, Paris, France, 1967</a:t>
             </a:r>
             <a:endParaRPr lang="en-US" sz="3600" dirty="0"/>
           </a:p>
@@ -13572,7 +14747,7 @@
               <a:buNone/>
             </a:pPr>
             <a:r>
-              <a:rPr lang="en-US" sz="1900" i="1" dirty="0">
+              <a:rPr lang="en-US" sz="2000" i="1" dirty="0">
                 <a:solidFill>
                   <a:srgbClr val="3C3828"/>
                 </a:solidFill>
@@ -13580,9 +14755,9 @@
                 <a:ea typeface="Georgia" pitchFamily="34" charset="-122"/>
                 <a:cs typeface="Georgia" pitchFamily="34" charset="-120"/>
               </a:rPr>
-              <a:t>I was out on the Right Bank just strolling… and came to this Metro stop and noticed a crowd and a man down, and as I inserted myself into the space to get closer, this worker with the hammer came quickly around the pole to make his way to some construction going on behind me, and BOOM! as he stepped over the man it all came together…</a:t>
-            </a:r>
-            <a:endParaRPr lang="en-US" sz="1900" dirty="0"/>
+              <a:t>I was out on the Right Bank just strolling… and came to this Metro stop and noticed a crowd and a man down, and as I inserted myself into the space to get closer, this worker with the hammer came quickly around the pole to make his way to some construction going on behind me, and BOOM! as he stepped over the man it all came together…</a:t>
+            </a:r>
+            <a:endParaRPr lang="en-US" sz="2000" dirty="0"/>
           </a:p>
         </p:txBody>
       </p:sp>
@@ -13813,7 +14988,7 @@
         </p:nvSpPr>
         <p:spPr>
           <a:xfrm>
-            <a:off x="685800" y="502920"/>
+            <a:off x="685800" y="274320"/>
             <a:ext cx="9357055" cy="320040"/>
           </a:xfrm>
           <a:prstGeom prst="rect">
@@ -13852,8 +15027,8 @@
         </p:nvSpPr>
         <p:spPr>
           <a:xfrm>
-            <a:off x="685800" y="868680"/>
-            <a:ext cx="9357055" cy="960120"/>
+            <a:off x="685800" y="621792"/>
+            <a:ext cx="9357055" cy="640080"/>
           </a:xfrm>
           <a:prstGeom prst="rect">
             <a:avLst/>
@@ -13869,7 +15044,7 @@
               <a:buNone/>
             </a:pPr>
             <a:r>
-              <a:rPr lang="en-US" sz="3600" dirty="0">
+              <a:rPr lang="en-US" sz="3200" dirty="0">
                 <a:solidFill>
                   <a:srgbClr val="3C3828"/>
                 </a:solidFill>
@@ -13879,7 +15054,7 @@
               </a:rPr>
               <a:t>Your essay prompt</a:t>
             </a:r>
-            <a:endParaRPr lang="en-US" sz="3600" dirty="0"/>
+            <a:endParaRPr lang="en-US" sz="3200" dirty="0"/>
           </a:p>
         </p:txBody>
       </p:sp>
@@ -13990,12 +15165,12 @@
         </p:nvSpPr>
         <p:spPr>
           <a:xfrm>
-            <a:off x="685800" y="1920240"/>
-            <a:ext cx="10820095" cy="4206240"/>
+            <a:off x="685800" y="1417320"/>
+            <a:ext cx="10820095" cy="4800600"/>
           </a:xfrm>
           <a:prstGeom prst="roundRect">
             <a:avLst>
-              <a:gd name="adj" fmla="val 3043"/>
+              <a:gd name="adj" fmla="val 2667"/>
             </a:avLst>
           </a:prstGeom>
           <a:solidFill>
@@ -14024,7 +15199,7 @@
         </p:nvSpPr>
         <p:spPr>
           <a:xfrm>
-            <a:off x="813816" y="1920240"/>
+            <a:off x="813816" y="1417320"/>
             <a:ext cx="10564063" cy="91440"/>
           </a:xfrm>
           <a:prstGeom prst="rect">
@@ -14049,7 +15224,7 @@
         </p:nvSpPr>
         <p:spPr>
           <a:xfrm>
-            <a:off x="1097280" y="2267712"/>
+            <a:off x="1097280" y="1764792"/>
             <a:ext cx="3840480" cy="420624"/>
           </a:xfrm>
           <a:prstGeom prst="roundRect">
@@ -14076,7 +15251,7 @@
         </p:nvSpPr>
         <p:spPr>
           <a:xfrm>
-            <a:off x="1097280" y="2267712"/>
+            <a:off x="1097280" y="1764792"/>
             <a:ext cx="3840480" cy="420624"/>
           </a:xfrm>
           <a:prstGeom prst="rect">
@@ -14115,8 +15290,8 @@
         </p:nvSpPr>
         <p:spPr>
           <a:xfrm>
-            <a:off x="1097280" y="2834640"/>
-            <a:ext cx="9997135" cy="3063240"/>
+            <a:off x="1097280" y="2331720"/>
+            <a:ext cx="9997135" cy="3657600"/>
           </a:xfrm>
           <a:prstGeom prst="rect">
             <a:avLst/>
@@ -14135,7 +15310,7 @@
               <a:buNone/>
             </a:pPr>
             <a:r>
-              <a:rPr lang="en-US" sz="1800" dirty="0">
+              <a:rPr lang="en-US" sz="2200" dirty="0">
                 <a:solidFill>
                   <a:srgbClr val="3C3828"/>
                 </a:solidFill>
@@ -14146,7 +15321,7 @@
               <a:t>Write an essay about </a:t>
             </a:r>
             <a:r>
-              <a:rPr lang="en-US" sz="1800" dirty="0">
+              <a:rPr lang="en-US" sz="2200" dirty="0">
                 <a:solidFill>
                   <a:srgbClr val="3C3828"/>
                 </a:solidFill>
@@ -14160,7 +15335,7 @@
               <a:t>a problem in your community</a:t>
             </a:r>
             <a:r>
-              <a:rPr lang="en-US" sz="1800" dirty="0">
+              <a:rPr lang="en-US" sz="2200" dirty="0">
                 <a:solidFill>
                   <a:srgbClr val="3C3828"/>
                 </a:solidFill>
@@ -14171,7 +15346,7 @@
               <a:t> and how we might solve it. “Community” might refer to your neighborhood, school, grade, city, state, country, age group, race, gender, or any other group you belong to. Your essay can focus on any problems that you see or feel. Use your personal experience and observations to develop your position, and evidence from your own experience to support your ideas. How do you propose we solve this problem? Your essay should be organized formally, with </a:t>
             </a:r>
             <a:r>
-              <a:rPr lang="en-US" sz="1800" dirty="0">
+              <a:rPr lang="en-US" sz="2200" dirty="0">
                 <a:solidFill>
                   <a:srgbClr val="3C3828"/>
                 </a:solidFill>
@@ -14184,7 +15359,7 @@
               </a:rPr>
               <a:t>an introduction, thesis statement, body paragraphs, and a conclusion.</a:t>
             </a:r>
-            <a:endParaRPr lang="en-US" sz="1800" dirty="0"/>
+            <a:endParaRPr lang="en-US" sz="2200" dirty="0"/>
           </a:p>
         </p:txBody>
       </p:sp>
@@ -14269,7 +15444,7 @@
         </p:nvSpPr>
         <p:spPr>
           <a:xfrm>
-            <a:off x="685800" y="502920"/>
+            <a:off x="685800" y="274320"/>
             <a:ext cx="9357055" cy="320040"/>
           </a:xfrm>
           <a:prstGeom prst="rect">
@@ -14308,8 +15483,8 @@
         </p:nvSpPr>
         <p:spPr>
           <a:xfrm>
-            <a:off x="685800" y="868680"/>
-            <a:ext cx="9357055" cy="960120"/>
+            <a:off x="685800" y="621792"/>
+            <a:ext cx="9357055" cy="640080"/>
           </a:xfrm>
           <a:prstGeom prst="rect">
             <a:avLst/>
@@ -14325,7 +15500,7 @@
               <a:buNone/>
             </a:pPr>
             <a:r>
-              <a:rPr lang="en-US" sz="3600" dirty="0">
+              <a:rPr lang="en-US" sz="3200" dirty="0">
                 <a:solidFill>
                   <a:srgbClr val="3C3828"/>
                 </a:solidFill>
@@ -14335,7 +15510,7 @@
               </a:rPr>
               <a:t>Your essay prompt</a:t>
             </a:r>
-            <a:endParaRPr lang="en-US" sz="3600" dirty="0"/>
+            <a:endParaRPr lang="en-US" sz="3200" dirty="0"/>
           </a:p>
         </p:txBody>
       </p:sp>
@@ -14446,12 +15621,12 @@
         </p:nvSpPr>
         <p:spPr>
           <a:xfrm>
-            <a:off x="685800" y="1920240"/>
-            <a:ext cx="10820095" cy="4206240"/>
+            <a:off x="685800" y="1417320"/>
+            <a:ext cx="10820095" cy="4800600"/>
           </a:xfrm>
           <a:prstGeom prst="roundRect">
             <a:avLst>
-              <a:gd name="adj" fmla="val 3043"/>
+              <a:gd name="adj" fmla="val 2667"/>
             </a:avLst>
           </a:prstGeom>
           <a:solidFill>
@@ -14480,7 +15655,7 @@
         </p:nvSpPr>
         <p:spPr>
           <a:xfrm>
-            <a:off x="813816" y="1920240"/>
+            <a:off x="813816" y="1417320"/>
             <a:ext cx="10564063" cy="91440"/>
           </a:xfrm>
           <a:prstGeom prst="rect">
@@ -14505,7 +15680,7 @@
         </p:nvSpPr>
         <p:spPr>
           <a:xfrm>
-            <a:off x="1097280" y="2267712"/>
+            <a:off x="1097280" y="1764792"/>
             <a:ext cx="3840480" cy="420624"/>
           </a:xfrm>
           <a:prstGeom prst="roundRect">
@@ -14532,7 +15707,7 @@
         </p:nvSpPr>
         <p:spPr>
           <a:xfrm>
-            <a:off x="1097280" y="2267712"/>
+            <a:off x="1097280" y="1764792"/>
             <a:ext cx="3840480" cy="420624"/>
           </a:xfrm>
           <a:prstGeom prst="rect">
@@ -14571,8 +15746,8 @@
         </p:nvSpPr>
         <p:spPr>
           <a:xfrm>
-            <a:off x="1097280" y="2834640"/>
-            <a:ext cx="9997135" cy="3063240"/>
+            <a:off x="1097280" y="2331720"/>
+            <a:ext cx="9997135" cy="3657600"/>
           </a:xfrm>
           <a:prstGeom prst="rect">
             <a:avLst/>
@@ -14591,7 +15766,7 @@
               <a:buNone/>
             </a:pPr>
             <a:r>
-              <a:rPr lang="en-US" sz="2200" dirty="0">
+              <a:rPr lang="en-US" sz="2400" dirty="0">
                 <a:solidFill>
                   <a:srgbClr val="3C3828"/>
                 </a:solidFill>
@@ -14602,7 +15777,7 @@
               <a:t>Write a critical essay about </a:t>
             </a:r>
             <a:r>
-              <a:rPr lang="en-US" sz="2200" dirty="0">
+              <a:rPr lang="en-US" sz="2400" dirty="0">
                 <a:solidFill>
                   <a:srgbClr val="3C3828"/>
                 </a:solidFill>
@@ -14616,7 +15791,7 @@
               <a:t>The Great Gatsby.</a:t>
             </a:r>
             <a:r>
-              <a:rPr lang="en-US" sz="2200" dirty="0">
+              <a:rPr lang="en-US" sz="2400" dirty="0">
                 <a:solidFill>
                   <a:srgbClr val="3C3828"/>
                 </a:solidFill>
@@ -14627,7 +15802,7 @@
               <a:t> You can choose </a:t>
             </a:r>
             <a:r>
-              <a:rPr lang="en-US" sz="2200" dirty="0">
+              <a:rPr lang="en-US" sz="2400" dirty="0">
                 <a:solidFill>
                   <a:srgbClr val="3C3828"/>
                 </a:solidFill>
@@ -14641,7 +15816,7 @@
               <a:t>any aspect of the novel that interests you.</a:t>
             </a:r>
             <a:r>
-              <a:rPr lang="en-US" sz="2200" dirty="0">
+              <a:rPr lang="en-US" sz="2400" dirty="0">
                 <a:solidFill>
                   <a:srgbClr val="3C3828"/>
                 </a:solidFill>
@@ -14652,7 +15827,7 @@
               <a:t> Consider the themes we’ve discussed, the characters, the settings, or anything you’ve noticed about the story that you think is worthy of discussion. Use your observations and opinions to develop your position, and quotations from the book to support your ideas. Your essay should be organized formally, with </a:t>
             </a:r>
             <a:r>
-              <a:rPr lang="en-US" sz="2200" dirty="0">
+              <a:rPr lang="en-US" sz="2400" dirty="0">
                 <a:solidFill>
                   <a:srgbClr val="3C3828"/>
                 </a:solidFill>
@@ -14665,7 +15840,7 @@
               </a:rPr>
               <a:t>an introduction, thesis statement, body paragraphs, and a conclusion.</a:t>
             </a:r>
-            <a:endParaRPr lang="en-US" sz="2200" dirty="0"/>
+            <a:endParaRPr lang="en-US" sz="2400" dirty="0"/>
           </a:p>
         </p:txBody>
       </p:sp>
@@ -14814,7 +15989,7 @@
                 <a:ea typeface="Georgia" pitchFamily="34" charset="-122"/>
                 <a:cs typeface="Georgia" pitchFamily="34" charset="-120"/>
               </a:rPr>
-              <a:t>So, how do you begin writing a critical essay?</a:t>
+              <a:t>So, how do you begin writing a critical essay?</a:t>
             </a:r>
             <a:endParaRPr lang="en-US" sz="3000" dirty="0"/>
           </a:p>
@@ -14969,7 +16144,7 @@
                 <a:ea typeface="Georgia" pitchFamily="34" charset="-122"/>
                 <a:cs typeface="Georgia" pitchFamily="34" charset="-120"/>
               </a:rPr>
-              <a:t>Let’s look at the form…</a:t>
+              <a:t>Let’s look at the form…</a:t>
             </a:r>
             <a:endParaRPr lang="en-US" sz="4000" dirty="0"/>
           </a:p>
@@ -15056,7 +16231,7 @@
         </p:nvSpPr>
         <p:spPr>
           <a:xfrm>
-            <a:off x="685800" y="502920"/>
+            <a:off x="685800" y="274320"/>
             <a:ext cx="9357055" cy="320040"/>
           </a:xfrm>
           <a:prstGeom prst="rect">
@@ -15095,8 +16270,8 @@
         </p:nvSpPr>
         <p:spPr>
           <a:xfrm>
-            <a:off x="685800" y="868680"/>
-            <a:ext cx="9357055" cy="960120"/>
+            <a:off x="685800" y="621792"/>
+            <a:ext cx="9357055" cy="640080"/>
           </a:xfrm>
           <a:prstGeom prst="rect">
             <a:avLst/>
@@ -15112,7 +16287,7 @@
               <a:buNone/>
             </a:pPr>
             <a:r>
-              <a:rPr lang="en-US" sz="3600" dirty="0">
+              <a:rPr lang="en-US" sz="3200" dirty="0">
                 <a:solidFill>
                   <a:srgbClr val="3C3828"/>
                 </a:solidFill>
@@ -15120,9 +16295,9 @@
                 <a:ea typeface="Georgia" pitchFamily="34" charset="-122"/>
                 <a:cs typeface="Georgia" pitchFamily="34" charset="-120"/>
               </a:rPr>
-              <a:t>The Critical Essay Form</a:t>
-            </a:r>
-            <a:endParaRPr lang="en-US" sz="3600" dirty="0"/>
+              <a:t>The Critical Essay Form</a:t>
+            </a:r>
+            <a:endParaRPr lang="en-US" sz="3200" dirty="0"/>
           </a:p>
         </p:txBody>
       </p:sp>
@@ -15134,12 +16309,12 @@
         </p:nvSpPr>
         <p:spPr>
           <a:xfrm>
-            <a:off x="685800" y="1828800"/>
-            <a:ext cx="3355277" cy="4343400"/>
+            <a:off x="685800" y="1417320"/>
+            <a:ext cx="3708464" cy="4800600"/>
           </a:xfrm>
           <a:prstGeom prst="roundRect">
             <a:avLst>
-              <a:gd name="adj" fmla="val 3815"/>
+              <a:gd name="adj" fmla="val 3452"/>
             </a:avLst>
           </a:prstGeom>
           <a:solidFill>
@@ -15176,8 +16351,8 @@
         </p:blipFill>
         <p:spPr>
           <a:xfrm>
-            <a:off x="813816" y="1956816"/>
-            <a:ext cx="3099245" cy="4087368"/>
+            <a:off x="813816" y="1545336"/>
+            <a:ext cx="3452432" cy="4544568"/>
           </a:xfrm>
           <a:prstGeom prst="rect">
             <a:avLst/>
@@ -15192,7 +16367,7 @@
         </p:nvSpPr>
         <p:spPr>
           <a:xfrm>
-            <a:off x="4589717" y="2231136"/>
+            <a:off x="4851464" y="2378964"/>
             <a:ext cx="292608" cy="292608"/>
           </a:xfrm>
           <a:prstGeom prst="ellipse">
@@ -15217,8 +16392,8 @@
         </p:nvSpPr>
         <p:spPr>
           <a:xfrm>
-            <a:off x="5065205" y="1965960"/>
-            <a:ext cx="6440691" cy="822960"/>
+            <a:off x="5326952" y="2202180"/>
+            <a:ext cx="6178944" cy="646176"/>
           </a:xfrm>
           <a:prstGeom prst="rect">
             <a:avLst/>
@@ -15256,7 +16431,7 @@
         </p:nvSpPr>
         <p:spPr>
           <a:xfrm>
-            <a:off x="4589717" y="3054096"/>
+            <a:off x="4851464" y="3025140"/>
             <a:ext cx="292608" cy="292608"/>
           </a:xfrm>
           <a:prstGeom prst="ellipse">
@@ -15281,8 +16456,8 @@
         </p:nvSpPr>
         <p:spPr>
           <a:xfrm>
-            <a:off x="5065205" y="2788920"/>
-            <a:ext cx="6440691" cy="822960"/>
+            <a:off x="5326952" y="2848356"/>
+            <a:ext cx="6178944" cy="646176"/>
           </a:xfrm>
           <a:prstGeom prst="rect">
             <a:avLst/>
@@ -15334,7 +16509,7 @@
         </p:nvSpPr>
         <p:spPr>
           <a:xfrm>
-            <a:off x="4589717" y="3877056"/>
+            <a:off x="4851464" y="3671316"/>
             <a:ext cx="292608" cy="292608"/>
           </a:xfrm>
           <a:prstGeom prst="ellipse">
@@ -15359,8 +16534,8 @@
         </p:nvSpPr>
         <p:spPr>
           <a:xfrm>
-            <a:off x="5065205" y="3611880"/>
-            <a:ext cx="6440691" cy="822960"/>
+            <a:off x="5326952" y="3494532"/>
+            <a:ext cx="6178944" cy="646176"/>
           </a:xfrm>
           <a:prstGeom prst="rect">
             <a:avLst/>
@@ -15398,7 +16573,7 @@
         </p:nvSpPr>
         <p:spPr>
           <a:xfrm>
-            <a:off x="4589717" y="4700016"/>
+            <a:off x="4851464" y="4317492"/>
             <a:ext cx="292608" cy="292608"/>
           </a:xfrm>
           <a:prstGeom prst="ellipse">
@@ -15423,8 +16598,8 @@
         </p:nvSpPr>
         <p:spPr>
           <a:xfrm>
-            <a:off x="5065205" y="4434840"/>
-            <a:ext cx="6440691" cy="822960"/>
+            <a:off x="5326952" y="4140708"/>
+            <a:ext cx="6178944" cy="646176"/>
           </a:xfrm>
           <a:prstGeom prst="rect">
             <a:avLst/>
@@ -15462,7 +16637,7 @@
         </p:nvSpPr>
         <p:spPr>
           <a:xfrm>
-            <a:off x="4589717" y="5522976"/>
+            <a:off x="4851464" y="4963668"/>
             <a:ext cx="292608" cy="292608"/>
           </a:xfrm>
           <a:prstGeom prst="ellipse">
@@ -15487,8 +16662,8 @@
         </p:nvSpPr>
         <p:spPr>
           <a:xfrm>
-            <a:off x="5065205" y="5257800"/>
-            <a:ext cx="6440691" cy="822960"/>
+            <a:off x="5326952" y="4786884"/>
+            <a:ext cx="6178944" cy="646176"/>
           </a:xfrm>
           <a:prstGeom prst="rect">
             <a:avLst/>

--- a/services/web-app/resources/thesis-essay-decks/lesson-2-pre-writing.pptx
+++ b/services/web-app/resources/thesis-essay-decks/lesson-2-pre-writing.pptx
@@ -3515,7 +3515,7 @@
               <a:buNone/>
             </a:pPr>
             <a:r>
-              <a:rPr lang="en-US" sz="1300" b="1" spc="200" kern="0" dirty="0">
+              <a:rPr lang="en-US" sz="1300" b="1" dirty="0">
                 <a:solidFill>
                   <a:srgbClr val="02BDC7"/>
                 </a:solidFill>
@@ -3523,7 +3523,7 @@
                 <a:ea typeface="Consolas" pitchFamily="34" charset="-122"/>
                 <a:cs typeface="Consolas" pitchFamily="34" charset="-120"/>
               </a:rPr>
-              <a:t>THESIS-DRIVEN ESSAY · LESSON 2</a:t>
+              <a:t>Thesis-Driven Essay · Lesson 2</a:t>
             </a:r>
             <a:endParaRPr lang="en-US" sz="1300" dirty="0"/>
           </a:p>
@@ -3833,7 +3833,7 @@
               <a:buNone/>
             </a:pPr>
             <a:r>
-              <a:rPr lang="en-US" sz="1200" b="1" spc="200" kern="0" dirty="0">
+              <a:rPr lang="en-US" sz="1200" b="1" dirty="0">
                 <a:solidFill>
                   <a:srgbClr val="FC4540"/>
                 </a:solidFill>
@@ -3841,7 +3841,7 @@
                 <a:ea typeface="Consolas" pitchFamily="34" charset="-122"/>
                 <a:cs typeface="Consolas" pitchFamily="34" charset="-120"/>
               </a:rPr>
-              <a:t>THE MVP</a:t>
+              <a:t>The MVP</a:t>
             </a:r>
             <a:endParaRPr lang="en-US" sz="1200" dirty="0"/>
           </a:p>
@@ -5126,7 +5126,7 @@
               <a:buNone/>
             </a:pPr>
             <a:r>
-              <a:rPr lang="en-US" sz="1200" b="1" spc="200" kern="0" dirty="0">
+              <a:rPr lang="en-US" sz="1200" b="1" dirty="0">
                 <a:solidFill>
                   <a:srgbClr val="FFB600"/>
                 </a:solidFill>
@@ -5134,7 +5134,7 @@
                 <a:ea typeface="Consolas" pitchFamily="34" charset="-122"/>
                 <a:cs typeface="Consolas" pitchFamily="34" charset="-120"/>
               </a:rPr>
-              <a:t>WHY PRE-WRITE</a:t>
+              <a:t>Why pre-write</a:t>
             </a:r>
             <a:endParaRPr lang="en-US" sz="1200" dirty="0"/>
           </a:p>
@@ -5677,7 +5677,7 @@
               <a:buNone/>
             </a:pPr>
             <a:r>
-              <a:rPr lang="en-US" sz="1200" b="1" spc="200" kern="0" dirty="0">
+              <a:rPr lang="en-US" sz="1200" b="1" dirty="0">
                 <a:solidFill>
                   <a:srgbClr val="FC4540"/>
                 </a:solidFill>
@@ -5685,7 +5685,7 @@
                 <a:ea typeface="Consolas" pitchFamily="34" charset="-122"/>
                 <a:cs typeface="Consolas" pitchFamily="34" charset="-120"/>
               </a:rPr>
-              <a:t>CRITICAL THINKING</a:t>
+              <a:t>Critical thinking</a:t>
             </a:r>
             <a:endParaRPr lang="en-US" sz="1200" dirty="0"/>
           </a:p>
@@ -6193,7 +6193,7 @@
               <a:buNone/>
             </a:pPr>
             <a:r>
-              <a:rPr lang="en-US" sz="1200" b="1" spc="200" kern="0" dirty="0">
+              <a:rPr lang="en-US" sz="1200" b="1" dirty="0">
                 <a:solidFill>
                   <a:srgbClr val="02BDC7"/>
                 </a:solidFill>
@@ -6201,7 +6201,7 @@
                 <a:ea typeface="Consolas" pitchFamily="34" charset="-122"/>
                 <a:cs typeface="Consolas" pitchFamily="34" charset="-120"/>
               </a:rPr>
-              <a:t>PRE-WRITE EXAMPLE</a:t>
+              <a:t>Pre-write example</a:t>
             </a:r>
             <a:endParaRPr lang="en-US" sz="1200" dirty="0"/>
           </a:p>
@@ -6712,7 +6712,7 @@
               <a:buNone/>
             </a:pPr>
             <a:r>
-              <a:rPr lang="en-US" sz="1200" b="1" spc="200" kern="0" dirty="0">
+              <a:rPr lang="en-US" sz="1200" b="1" dirty="0">
                 <a:solidFill>
                   <a:srgbClr val="FF9755"/>
                 </a:solidFill>
@@ -6720,7 +6720,7 @@
                 <a:ea typeface="Consolas" pitchFamily="34" charset="-122"/>
                 <a:cs typeface="Consolas" pitchFamily="34" charset="-120"/>
               </a:rPr>
-              <a:t>PRE-WRITE EXAMPLE</a:t>
+              <a:t>Pre-write example</a:t>
             </a:r>
             <a:endParaRPr lang="en-US" sz="1200" dirty="0"/>
           </a:p>
@@ -7209,7 +7209,7 @@
               <a:buNone/>
             </a:pPr>
             <a:r>
-              <a:rPr lang="en-US" sz="1200" b="1" spc="200" kern="0" dirty="0">
+              <a:rPr lang="en-US" sz="1200" b="1" dirty="0">
                 <a:solidFill>
                   <a:srgbClr val="02BDC7"/>
                 </a:solidFill>
@@ -7217,7 +7217,7 @@
                 <a:ea typeface="Consolas" pitchFamily="34" charset="-122"/>
                 <a:cs typeface="Consolas" pitchFamily="34" charset="-120"/>
               </a:rPr>
-              <a:t>YOUR TURN</a:t>
+              <a:t>Your turn</a:t>
             </a:r>
             <a:endParaRPr lang="en-US" sz="1200" dirty="0"/>
           </a:p>
@@ -7968,7 +7968,7 @@
               <a:buNone/>
             </a:pPr>
             <a:r>
-              <a:rPr lang="en-US" sz="1200" b="1" spc="200" kern="0" dirty="0">
+              <a:rPr lang="en-US" sz="1200" b="1" dirty="0">
                 <a:solidFill>
                   <a:srgbClr val="FFB600"/>
                 </a:solidFill>
@@ -7976,7 +7976,7 @@
                 <a:ea typeface="Consolas" pitchFamily="34" charset="-122"/>
                 <a:cs typeface="Consolas" pitchFamily="34" charset="-120"/>
               </a:rPr>
-              <a:t>YOUR TURN</a:t>
+              <a:t>Your turn</a:t>
             </a:r>
             <a:endParaRPr lang="en-US" sz="1200" dirty="0"/>
           </a:p>
@@ -9110,7 +9110,7 @@
               <a:buNone/>
             </a:pPr>
             <a:r>
-              <a:rPr lang="en-US" sz="1200" b="1" spc="200" kern="0" dirty="0">
+              <a:rPr lang="en-US" sz="1200" b="1" dirty="0">
                 <a:solidFill>
                   <a:srgbClr val="FFB600"/>
                 </a:solidFill>
@@ -9118,7 +9118,7 @@
                 <a:ea typeface="Consolas" pitchFamily="34" charset="-122"/>
                 <a:cs typeface="Consolas" pitchFamily="34" charset="-120"/>
               </a:rPr>
-              <a:t>PRE-WRITING GOAL</a:t>
+              <a:t>Pre-writing goal</a:t>
             </a:r>
             <a:endParaRPr lang="en-US" sz="1200" dirty="0"/>
           </a:p>
@@ -9452,7 +9452,7 @@
               <a:buNone/>
             </a:pPr>
             <a:r>
-              <a:rPr lang="en-US" sz="1200" b="1" spc="200" kern="0" dirty="0">
+              <a:rPr lang="en-US" sz="1200" b="1" dirty="0">
                 <a:solidFill>
                   <a:srgbClr val="FF9755"/>
                 </a:solidFill>
@@ -9460,7 +9460,7 @@
                 <a:ea typeface="Consolas" pitchFamily="34" charset="-122"/>
                 <a:cs typeface="Consolas" pitchFamily="34" charset="-120"/>
               </a:rPr>
-              <a:t>PRE-WRITING</a:t>
+              <a:t>Pre-writing</a:t>
             </a:r>
             <a:endParaRPr lang="en-US" sz="1200" dirty="0"/>
           </a:p>
@@ -10136,7 +10136,7 @@
               <a:buNone/>
             </a:pPr>
             <a:r>
-              <a:rPr lang="en-US" sz="1200" b="1" spc="200" kern="0" dirty="0">
+              <a:rPr lang="en-US" sz="1200" b="1" dirty="0">
                 <a:solidFill>
                   <a:srgbClr val="FFB600"/>
                 </a:solidFill>
@@ -10144,7 +10144,7 @@
                 <a:ea typeface="Consolas" pitchFamily="34" charset="-122"/>
                 <a:cs typeface="Consolas" pitchFamily="34" charset="-120"/>
               </a:rPr>
-              <a:t>WHY WE’RE HERE</a:t>
+              <a:t>Why we’re here</a:t>
             </a:r>
             <a:endParaRPr lang="en-US" sz="1200" dirty="0"/>
           </a:p>
@@ -10936,7 +10936,7 @@
               <a:buNone/>
             </a:pPr>
             <a:r>
-              <a:rPr lang="en-US" sz="1400" b="1" spc="200" kern="0" dirty="0">
+              <a:rPr lang="en-US" sz="1400" b="1" dirty="0">
                 <a:solidFill>
                   <a:srgbClr val="FF9755"/>
                 </a:solidFill>
@@ -10944,7 +10944,7 @@
                 <a:ea typeface="Consolas" pitchFamily="34" charset="-122"/>
                 <a:cs typeface="Consolas" pitchFamily="34" charset="-120"/>
               </a:rPr>
-              <a:t>WRITING TIME</a:t>
+              <a:t>Writing time</a:t>
             </a:r>
             <a:endParaRPr lang="en-US" sz="1400" dirty="0"/>
           </a:p>
@@ -11388,7 +11388,7 @@
               <a:buNone/>
             </a:pPr>
             <a:r>
-              <a:rPr lang="en-US" sz="1200" b="1" spc="200" kern="0" dirty="0">
+              <a:rPr lang="en-US" sz="1200" b="1" dirty="0">
                 <a:solidFill>
                   <a:srgbClr val="FC4067"/>
                 </a:solidFill>
@@ -11396,7 +11396,7 @@
                 <a:ea typeface="Consolas" pitchFamily="34" charset="-122"/>
                 <a:cs typeface="Consolas" pitchFamily="34" charset="-120"/>
               </a:rPr>
-              <a:t>NARROWING DOWN</a:t>
+              <a:t>Narrowing down</a:t>
             </a:r>
             <a:endParaRPr lang="en-US" sz="1200" dirty="0"/>
           </a:p>
@@ -11705,7 +11705,7 @@
               <a:buNone/>
             </a:pPr>
             <a:r>
-              <a:rPr lang="en-US" sz="1200" b="1" spc="200" kern="0" dirty="0">
+              <a:rPr lang="en-US" sz="1200" b="1" dirty="0">
                 <a:solidFill>
                   <a:srgbClr val="FFB600"/>
                 </a:solidFill>
@@ -11713,7 +11713,7 @@
                 <a:ea typeface="Consolas" pitchFamily="34" charset="-122"/>
                 <a:cs typeface="Consolas" pitchFamily="34" charset="-120"/>
               </a:rPr>
-              <a:t>BEFORE YOU GO</a:t>
+              <a:t>Before you go</a:t>
             </a:r>
             <a:endParaRPr lang="en-US" sz="1200" dirty="0"/>
           </a:p>
@@ -12577,7 +12577,7 @@
               <a:buNone/>
             </a:pPr>
             <a:r>
-              <a:rPr lang="en-US" sz="1200" b="1" spc="200" kern="0" dirty="0">
+              <a:rPr lang="en-US" sz="1200" b="1" dirty="0">
                 <a:solidFill>
                   <a:srgbClr val="FC4540"/>
                 </a:solidFill>
@@ -12585,7 +12585,7 @@
                 <a:ea typeface="Consolas" pitchFamily="34" charset="-122"/>
                 <a:cs typeface="Consolas" pitchFamily="34" charset="-120"/>
               </a:rPr>
-              <a:t>REMEMBER</a:t>
+              <a:t>Remember</a:t>
             </a:r>
             <a:endParaRPr lang="en-US" sz="1200" dirty="0"/>
           </a:p>
@@ -13631,7 +13631,7 @@
               <a:buNone/>
             </a:pPr>
             <a:r>
-              <a:rPr lang="en-US" sz="1200" b="1" spc="200" kern="0" dirty="0">
+              <a:rPr lang="en-US" sz="1200" b="1" dirty="0">
                 <a:solidFill>
                   <a:srgbClr val="02BDC7"/>
                 </a:solidFill>
@@ -13639,7 +13639,7 @@
                 <a:ea typeface="Consolas" pitchFamily="34" charset="-122"/>
                 <a:cs typeface="Consolas" pitchFamily="34" charset="-120"/>
               </a:rPr>
-              <a:t>WARM-UP · OBSERVE</a:t>
+              <a:t>Warm-up · Observe</a:t>
             </a:r>
             <a:endParaRPr lang="en-US" sz="1200" dirty="0"/>
           </a:p>
@@ -14004,7 +14004,7 @@
               <a:buNone/>
             </a:pPr>
             <a:r>
-              <a:rPr lang="en-US" sz="1200" b="1" spc="200" kern="0" dirty="0">
+              <a:rPr lang="en-US" sz="1200" b="1" dirty="0">
                 <a:solidFill>
                   <a:srgbClr val="FC4540"/>
                 </a:solidFill>
@@ -14012,7 +14012,7 @@
                 <a:ea typeface="Consolas" pitchFamily="34" charset="-122"/>
                 <a:cs typeface="Consolas" pitchFamily="34" charset="-120"/>
               </a:rPr>
-              <a:t>WARM-UP · ANALYZE</a:t>
+              <a:t>Warm-up · Analyze</a:t>
             </a:r>
             <a:endParaRPr lang="en-US" sz="1200" dirty="0"/>
           </a:p>
@@ -14568,7 +14568,7 @@
               <a:buNone/>
             </a:pPr>
             <a:r>
-              <a:rPr lang="en-US" sz="1200" b="1" spc="200" kern="0" dirty="0">
+              <a:rPr lang="en-US" sz="1200" b="1" dirty="0">
                 <a:solidFill>
                   <a:srgbClr val="FFB600"/>
                 </a:solidFill>
@@ -14576,7 +14576,7 @@
                 <a:ea typeface="Consolas" pitchFamily="34" charset="-122"/>
                 <a:cs typeface="Consolas" pitchFamily="34" charset="-120"/>
               </a:rPr>
-              <a:t>THE REVEAL</a:t>
+              <a:t>The reveal</a:t>
             </a:r>
             <a:endParaRPr lang="en-US" sz="1200" dirty="0"/>
           </a:p>
@@ -15005,7 +15005,7 @@
               <a:buNone/>
             </a:pPr>
             <a:r>
-              <a:rPr lang="en-US" sz="1200" b="1" spc="200" kern="0" dirty="0">
+              <a:rPr lang="en-US" sz="1200" b="1" dirty="0">
                 <a:solidFill>
                   <a:srgbClr val="02BDC7"/>
                 </a:solidFill>
@@ -15013,7 +15013,7 @@
                 <a:ea typeface="Consolas" pitchFamily="34" charset="-122"/>
                 <a:cs typeface="Consolas" pitchFamily="34" charset="-120"/>
               </a:rPr>
-              <a:t>THE PROMPT</a:t>
+              <a:t>The prompt</a:t>
             </a:r>
             <a:endParaRPr lang="en-US" sz="1200" dirty="0"/>
           </a:p>
@@ -15461,7 +15461,7 @@
               <a:buNone/>
             </a:pPr>
             <a:r>
-              <a:rPr lang="en-US" sz="1200" b="1" spc="200" kern="0" dirty="0">
+              <a:rPr lang="en-US" sz="1200" b="1" dirty="0">
                 <a:solidFill>
                   <a:srgbClr val="FF9755"/>
                 </a:solidFill>
@@ -15469,7 +15469,7 @@
                 <a:ea typeface="Consolas" pitchFamily="34" charset="-122"/>
                 <a:cs typeface="Consolas" pitchFamily="34" charset="-120"/>
               </a:rPr>
-              <a:t>THE PROMPT</a:t>
+              <a:t>The prompt</a:t>
             </a:r>
             <a:endParaRPr lang="en-US" sz="1200" dirty="0"/>
           </a:p>
@@ -15942,7 +15942,7 @@
               <a:buNone/>
             </a:pPr>
             <a:r>
-              <a:rPr lang="en-US" sz="1200" b="1" spc="200" kern="0" dirty="0">
+              <a:rPr lang="en-US" sz="1200" b="1" dirty="0">
                 <a:solidFill>
                   <a:srgbClr val="FFB600"/>
                 </a:solidFill>
@@ -15950,7 +15950,7 @@
                 <a:ea typeface="Consolas" pitchFamily="34" charset="-122"/>
                 <a:cs typeface="Consolas" pitchFamily="34" charset="-120"/>
               </a:rPr>
-              <a:t>GETTING STARTED</a:t>
+              <a:t>Getting started</a:t>
             </a:r>
             <a:endParaRPr lang="en-US" sz="1200" dirty="0"/>
           </a:p>
@@ -16248,7 +16248,7 @@
               <a:buNone/>
             </a:pPr>
             <a:r>
-              <a:rPr lang="en-US" sz="1200" b="1" spc="200" kern="0" dirty="0">
+              <a:rPr lang="en-US" sz="1200" b="1" dirty="0">
                 <a:solidFill>
                   <a:srgbClr val="02BDC7"/>
                 </a:solidFill>
@@ -16256,7 +16256,7 @@
                 <a:ea typeface="Consolas" pitchFamily="34" charset="-122"/>
                 <a:cs typeface="Consolas" pitchFamily="34" charset="-120"/>
               </a:rPr>
-              <a:t>THE FORM</a:t>
+              <a:t>The form</a:t>
             </a:r>
             <a:endParaRPr lang="en-US" sz="1200" dirty="0"/>
           </a:p>
